--- a/RISCVstage4.pptx
+++ b/RISCVstage4.pptx
@@ -464,7 +464,7 @@
           <a:p>
             <a:fld id="{51AFF834-1BEC-4F95-9622-28B5DCC1FE16}" type="datetimeFigureOut">
               <a:rPr lang="en-US" smtClean="0"/>
-              <a:t>4/18/2026</a:t>
+              <a:t>5/8/2026</a:t>
             </a:fld>
             <a:endParaRPr lang="en-US"/>
           </a:p>
@@ -662,7 +662,7 @@
           <a:p>
             <a:fld id="{51AFF834-1BEC-4F95-9622-28B5DCC1FE16}" type="datetimeFigureOut">
               <a:rPr lang="en-US" smtClean="0"/>
-              <a:t>4/18/2026</a:t>
+              <a:t>5/8/2026</a:t>
             </a:fld>
             <a:endParaRPr lang="en-US"/>
           </a:p>
@@ -870,7 +870,7 @@
           <a:p>
             <a:fld id="{51AFF834-1BEC-4F95-9622-28B5DCC1FE16}" type="datetimeFigureOut">
               <a:rPr lang="en-US" smtClean="0"/>
-              <a:t>4/18/2026</a:t>
+              <a:t>5/8/2026</a:t>
             </a:fld>
             <a:endParaRPr lang="en-US"/>
           </a:p>
@@ -1068,7 +1068,7 @@
           <a:p>
             <a:fld id="{51AFF834-1BEC-4F95-9622-28B5DCC1FE16}" type="datetimeFigureOut">
               <a:rPr lang="en-US" smtClean="0"/>
-              <a:t>4/18/2026</a:t>
+              <a:t>5/8/2026</a:t>
             </a:fld>
             <a:endParaRPr lang="en-US"/>
           </a:p>
@@ -1343,7 +1343,7 @@
           <a:p>
             <a:fld id="{51AFF834-1BEC-4F95-9622-28B5DCC1FE16}" type="datetimeFigureOut">
               <a:rPr lang="en-US" smtClean="0"/>
-              <a:t>4/18/2026</a:t>
+              <a:t>5/8/2026</a:t>
             </a:fld>
             <a:endParaRPr lang="en-US"/>
           </a:p>
@@ -1608,7 +1608,7 @@
           <a:p>
             <a:fld id="{51AFF834-1BEC-4F95-9622-28B5DCC1FE16}" type="datetimeFigureOut">
               <a:rPr lang="en-US" smtClean="0"/>
-              <a:t>4/18/2026</a:t>
+              <a:t>5/8/2026</a:t>
             </a:fld>
             <a:endParaRPr lang="en-US"/>
           </a:p>
@@ -2020,7 +2020,7 @@
           <a:p>
             <a:fld id="{51AFF834-1BEC-4F95-9622-28B5DCC1FE16}" type="datetimeFigureOut">
               <a:rPr lang="en-US" smtClean="0"/>
-              <a:t>4/18/2026</a:t>
+              <a:t>5/8/2026</a:t>
             </a:fld>
             <a:endParaRPr lang="en-US"/>
           </a:p>
@@ -2161,7 +2161,7 @@
           <a:p>
             <a:fld id="{51AFF834-1BEC-4F95-9622-28B5DCC1FE16}" type="datetimeFigureOut">
               <a:rPr lang="en-US" smtClean="0"/>
-              <a:t>4/18/2026</a:t>
+              <a:t>5/8/2026</a:t>
             </a:fld>
             <a:endParaRPr lang="en-US"/>
           </a:p>
@@ -2274,7 +2274,7 @@
           <a:p>
             <a:fld id="{51AFF834-1BEC-4F95-9622-28B5DCC1FE16}" type="datetimeFigureOut">
               <a:rPr lang="en-US" smtClean="0"/>
-              <a:t>4/18/2026</a:t>
+              <a:t>5/8/2026</a:t>
             </a:fld>
             <a:endParaRPr lang="en-US"/>
           </a:p>
@@ -2585,7 +2585,7 @@
           <a:p>
             <a:fld id="{51AFF834-1BEC-4F95-9622-28B5DCC1FE16}" type="datetimeFigureOut">
               <a:rPr lang="en-US" smtClean="0"/>
-              <a:t>4/18/2026</a:t>
+              <a:t>5/8/2026</a:t>
             </a:fld>
             <a:endParaRPr lang="en-US"/>
           </a:p>
@@ -2873,7 +2873,7 @@
           <a:p>
             <a:fld id="{51AFF834-1BEC-4F95-9622-28B5DCC1FE16}" type="datetimeFigureOut">
               <a:rPr lang="en-US" smtClean="0"/>
-              <a:t>4/18/2026</a:t>
+              <a:t>5/8/2026</a:t>
             </a:fld>
             <a:endParaRPr lang="en-US"/>
           </a:p>
@@ -3114,7 +3114,7 @@
           <a:p>
             <a:fld id="{51AFF834-1BEC-4F95-9622-28B5DCC1FE16}" type="datetimeFigureOut">
               <a:rPr lang="en-US" smtClean="0"/>
-              <a:t>4/18/2026</a:t>
+              <a:t>5/8/2026</a:t>
             </a:fld>
             <a:endParaRPr lang="en-US"/>
           </a:p>
@@ -3597,7 +3597,7 @@
         </p:nvSpPr>
         <p:spPr>
           <a:xfrm>
-            <a:off x="3825240" y="82040"/>
+            <a:off x="3979857" y="-9084"/>
             <a:ext cx="4810420" cy="553998"/>
           </a:xfrm>
           <a:prstGeom prst="rect">
@@ -11232,42 +11232,6 @@
           </a:fontRef>
         </p:style>
       </p:cxnSp>
-      <p:sp>
-        <p:nvSpPr>
-          <p:cNvPr id="151" name="TextBox 150">
-            <a:extLst>
-              <a:ext uri="{FF2B5EF4-FFF2-40B4-BE49-F238E27FC236}">
-                <a16:creationId xmlns:a16="http://schemas.microsoft.com/office/drawing/2014/main" id="{CD28274F-92E6-F852-6391-A717240DE2DF}"/>
-              </a:ext>
-            </a:extLst>
-          </p:cNvPr>
-          <p:cNvSpPr txBox="1"/>
-          <p:nvPr/>
-        </p:nvSpPr>
-        <p:spPr>
-          <a:xfrm>
-            <a:off x="4444698" y="1106312"/>
-            <a:ext cx="474810" cy="230832"/>
-          </a:xfrm>
-          <a:prstGeom prst="rect">
-            <a:avLst/>
-          </a:prstGeom>
-          <a:noFill/>
-        </p:spPr>
-        <p:txBody>
-          <a:bodyPr wrap="none" rtlCol="0">
-            <a:spAutoFit/>
-          </a:bodyPr>
-          <a:lstStyle/>
-          <a:p>
-            <a:pPr algn="ctr"/>
-            <a:r>
-              <a:rPr lang="en-US" sz="900" dirty="0"/>
-              <a:t>dout1</a:t>
-            </a:r>
-          </a:p>
-        </p:txBody>
-      </p:sp>
       <p:cxnSp>
         <p:nvCxnSpPr>
           <p:cNvPr id="152" name="Straight Arrow Connector 151">
@@ -11423,362 +11387,6 @@
             <a:avLst/>
           </a:prstGeom>
           <a:ln>
-            <a:tailEnd type="triangle"/>
-          </a:ln>
-        </p:spPr>
-        <p:style>
-          <a:lnRef idx="2">
-            <a:schemeClr val="accent1"/>
-          </a:lnRef>
-          <a:fillRef idx="0">
-            <a:schemeClr val="accent1"/>
-          </a:fillRef>
-          <a:effectRef idx="1">
-            <a:schemeClr val="accent1"/>
-          </a:effectRef>
-          <a:fontRef idx="minor">
-            <a:schemeClr val="tx1"/>
-          </a:fontRef>
-        </p:style>
-      </p:cxnSp>
-      <p:sp>
-        <p:nvSpPr>
-          <p:cNvPr id="156" name="TextBox 155">
-            <a:extLst>
-              <a:ext uri="{FF2B5EF4-FFF2-40B4-BE49-F238E27FC236}">
-                <a16:creationId xmlns:a16="http://schemas.microsoft.com/office/drawing/2014/main" id="{2566064C-F469-508F-113D-556CBC75A869}"/>
-              </a:ext>
-            </a:extLst>
-          </p:cNvPr>
-          <p:cNvSpPr txBox="1"/>
-          <p:nvPr/>
-        </p:nvSpPr>
-        <p:spPr>
-          <a:xfrm>
-            <a:off x="4801135" y="1092519"/>
-            <a:ext cx="474810" cy="230832"/>
-          </a:xfrm>
-          <a:prstGeom prst="rect">
-            <a:avLst/>
-          </a:prstGeom>
-          <a:noFill/>
-        </p:spPr>
-        <p:txBody>
-          <a:bodyPr wrap="none" rtlCol="0">
-            <a:spAutoFit/>
-          </a:bodyPr>
-          <a:lstStyle/>
-          <a:p>
-            <a:pPr algn="ctr"/>
-            <a:r>
-              <a:rPr lang="en-US" sz="900" dirty="0"/>
-              <a:t>dout2</a:t>
-            </a:r>
-          </a:p>
-        </p:txBody>
-      </p:sp>
-      <p:cxnSp>
-        <p:nvCxnSpPr>
-          <p:cNvPr id="200" name="Straight Arrow Connector 199">
-            <a:extLst>
-              <a:ext uri="{FF2B5EF4-FFF2-40B4-BE49-F238E27FC236}">
-                <a16:creationId xmlns:a16="http://schemas.microsoft.com/office/drawing/2014/main" id="{D4AC79D0-5B76-D005-1A27-F76F271A152F}"/>
-              </a:ext>
-            </a:extLst>
-          </p:cNvPr>
-          <p:cNvCxnSpPr/>
-          <p:nvPr/>
-        </p:nvCxnSpPr>
-        <p:spPr>
-          <a:xfrm flipV="1">
-            <a:off x="8862876" y="3303944"/>
-            <a:ext cx="0" cy="167673"/>
-          </a:xfrm>
-          <a:prstGeom prst="straightConnector1">
-            <a:avLst/>
-          </a:prstGeom>
-          <a:ln>
-            <a:solidFill>
-              <a:srgbClr val="FF0000"/>
-            </a:solidFill>
-            <a:tailEnd type="triangle"/>
-          </a:ln>
-        </p:spPr>
-        <p:style>
-          <a:lnRef idx="2">
-            <a:schemeClr val="accent1"/>
-          </a:lnRef>
-          <a:fillRef idx="0">
-            <a:schemeClr val="accent1"/>
-          </a:fillRef>
-          <a:effectRef idx="1">
-            <a:schemeClr val="accent1"/>
-          </a:effectRef>
-          <a:fontRef idx="minor">
-            <a:schemeClr val="tx1"/>
-          </a:fontRef>
-        </p:style>
-      </p:cxnSp>
-      <p:sp>
-        <p:nvSpPr>
-          <p:cNvPr id="209" name="Rectangle 208">
-            <a:extLst>
-              <a:ext uri="{FF2B5EF4-FFF2-40B4-BE49-F238E27FC236}">
-                <a16:creationId xmlns:a16="http://schemas.microsoft.com/office/drawing/2014/main" id="{7E4C1978-E959-3B8A-9B69-5A0570C1B433}"/>
-              </a:ext>
-            </a:extLst>
-          </p:cNvPr>
-          <p:cNvSpPr/>
-          <p:nvPr/>
-        </p:nvSpPr>
-        <p:spPr>
-          <a:xfrm>
-            <a:off x="4259968" y="5572927"/>
-            <a:ext cx="663423" cy="460640"/>
-          </a:xfrm>
-          <a:prstGeom prst="rect">
-            <a:avLst/>
-          </a:prstGeom>
-          <a:solidFill>
-            <a:schemeClr val="bg1"/>
-          </a:solidFill>
-        </p:spPr>
-        <p:style>
-          <a:lnRef idx="2">
-            <a:schemeClr val="accent1">
-              <a:shade val="15000"/>
-            </a:schemeClr>
-          </a:lnRef>
-          <a:fillRef idx="1">
-            <a:schemeClr val="accent1"/>
-          </a:fillRef>
-          <a:effectRef idx="0">
-            <a:schemeClr val="accent1"/>
-          </a:effectRef>
-          <a:fontRef idx="minor">
-            <a:schemeClr val="lt1"/>
-          </a:fontRef>
-        </p:style>
-        <p:txBody>
-          <a:bodyPr rtlCol="0" anchor="ctr"/>
-          <a:lstStyle/>
-          <a:p>
-            <a:pPr algn="ctr"/>
-            <a:r>
-              <a:rPr lang="en-US" dirty="0"/>
-              <a:t>PC</a:t>
-            </a:r>
-          </a:p>
-        </p:txBody>
-      </p:sp>
-      <p:sp>
-        <p:nvSpPr>
-          <p:cNvPr id="210" name="TextBox 209">
-            <a:extLst>
-              <a:ext uri="{FF2B5EF4-FFF2-40B4-BE49-F238E27FC236}">
-                <a16:creationId xmlns:a16="http://schemas.microsoft.com/office/drawing/2014/main" id="{B99D9E74-E1B6-5F46-688D-FBFA65E6AF93}"/>
-              </a:ext>
-            </a:extLst>
-          </p:cNvPr>
-          <p:cNvSpPr txBox="1"/>
-          <p:nvPr/>
-        </p:nvSpPr>
-        <p:spPr>
-          <a:xfrm>
-            <a:off x="4318876" y="5611381"/>
-            <a:ext cx="574196" cy="384721"/>
-          </a:xfrm>
-          <a:prstGeom prst="rect">
-            <a:avLst/>
-          </a:prstGeom>
-          <a:noFill/>
-        </p:spPr>
-        <p:txBody>
-          <a:bodyPr wrap="square" rtlCol="0">
-            <a:spAutoFit/>
-          </a:bodyPr>
-          <a:lstStyle/>
-          <a:p>
-            <a:pPr algn="ctr"/>
-            <a:r>
-              <a:rPr lang="en-US" sz="1000" dirty="0"/>
-              <a:t>Stall</a:t>
-            </a:r>
-          </a:p>
-          <a:p>
-            <a:pPr algn="ctr"/>
-            <a:r>
-              <a:rPr lang="en-US" sz="900" dirty="0"/>
-              <a:t>counter</a:t>
-            </a:r>
-          </a:p>
-        </p:txBody>
-      </p:sp>
-      <p:cxnSp>
-        <p:nvCxnSpPr>
-          <p:cNvPr id="211" name="Straight Arrow Connector 210">
-            <a:extLst>
-              <a:ext uri="{FF2B5EF4-FFF2-40B4-BE49-F238E27FC236}">
-                <a16:creationId xmlns:a16="http://schemas.microsoft.com/office/drawing/2014/main" id="{35A73827-A0E8-19ED-1B3D-EEA836E5E5D2}"/>
-              </a:ext>
-            </a:extLst>
-          </p:cNvPr>
-          <p:cNvCxnSpPr>
-            <a:cxnSpLocks/>
-          </p:cNvCxnSpPr>
-          <p:nvPr/>
-        </p:nvCxnSpPr>
-        <p:spPr>
-          <a:xfrm>
-            <a:off x="4030095" y="5710140"/>
-            <a:ext cx="229874" cy="0"/>
-          </a:xfrm>
-          <a:prstGeom prst="straightConnector1">
-            <a:avLst/>
-          </a:prstGeom>
-          <a:ln>
-            <a:solidFill>
-              <a:srgbClr val="FF0000"/>
-            </a:solidFill>
-            <a:tailEnd type="triangle"/>
-          </a:ln>
-        </p:spPr>
-        <p:style>
-          <a:lnRef idx="2">
-            <a:schemeClr val="accent1"/>
-          </a:lnRef>
-          <a:fillRef idx="0">
-            <a:schemeClr val="accent1"/>
-          </a:fillRef>
-          <a:effectRef idx="1">
-            <a:schemeClr val="accent1"/>
-          </a:effectRef>
-          <a:fontRef idx="minor">
-            <a:schemeClr val="tx1"/>
-          </a:fontRef>
-        </p:style>
-      </p:cxnSp>
-      <p:sp>
-        <p:nvSpPr>
-          <p:cNvPr id="212" name="Rectangle 211">
-            <a:extLst>
-              <a:ext uri="{FF2B5EF4-FFF2-40B4-BE49-F238E27FC236}">
-                <a16:creationId xmlns:a16="http://schemas.microsoft.com/office/drawing/2014/main" id="{42328FB6-6571-FA3C-8E81-028268A77042}"/>
-              </a:ext>
-            </a:extLst>
-          </p:cNvPr>
-          <p:cNvSpPr/>
-          <p:nvPr/>
-        </p:nvSpPr>
-        <p:spPr>
-          <a:xfrm>
-            <a:off x="3351306" y="5573141"/>
-            <a:ext cx="678789" cy="484706"/>
-          </a:xfrm>
-          <a:prstGeom prst="rect">
-            <a:avLst/>
-          </a:prstGeom>
-          <a:solidFill>
-            <a:schemeClr val="bg1"/>
-          </a:solidFill>
-        </p:spPr>
-        <p:style>
-          <a:lnRef idx="2">
-            <a:schemeClr val="accent1">
-              <a:shade val="15000"/>
-            </a:schemeClr>
-          </a:lnRef>
-          <a:fillRef idx="1">
-            <a:schemeClr val="accent1"/>
-          </a:fillRef>
-          <a:effectRef idx="0">
-            <a:schemeClr val="accent1"/>
-          </a:effectRef>
-          <a:fontRef idx="minor">
-            <a:schemeClr val="lt1"/>
-          </a:fontRef>
-        </p:style>
-        <p:txBody>
-          <a:bodyPr rtlCol="0" anchor="ctr"/>
-          <a:lstStyle/>
-          <a:p>
-            <a:pPr algn="ctr"/>
-            <a:r>
-              <a:rPr lang="en-US" dirty="0"/>
-              <a:t>PC</a:t>
-            </a:r>
-          </a:p>
-        </p:txBody>
-      </p:sp>
-      <p:sp>
-        <p:nvSpPr>
-          <p:cNvPr id="213" name="TextBox 212">
-            <a:extLst>
-              <a:ext uri="{FF2B5EF4-FFF2-40B4-BE49-F238E27FC236}">
-                <a16:creationId xmlns:a16="http://schemas.microsoft.com/office/drawing/2014/main" id="{3468D653-D2DB-10F8-EB42-1EF2F69D462B}"/>
-              </a:ext>
-            </a:extLst>
-          </p:cNvPr>
-          <p:cNvSpPr txBox="1"/>
-          <p:nvPr/>
-        </p:nvSpPr>
-        <p:spPr>
-          <a:xfrm>
-            <a:off x="3316652" y="5593028"/>
-            <a:ext cx="729687" cy="400110"/>
-          </a:xfrm>
-          <a:prstGeom prst="rect">
-            <a:avLst/>
-          </a:prstGeom>
-          <a:noFill/>
-        </p:spPr>
-        <p:txBody>
-          <a:bodyPr wrap="square" rtlCol="0">
-            <a:spAutoFit/>
-          </a:bodyPr>
-          <a:lstStyle/>
-          <a:p>
-            <a:pPr algn="ctr"/>
-            <a:r>
-              <a:rPr lang="en-US" sz="1000" dirty="0"/>
-              <a:t>Hazard</a:t>
-            </a:r>
-          </a:p>
-          <a:p>
-            <a:pPr algn="ctr"/>
-            <a:r>
-              <a:rPr lang="en-US" sz="1000" dirty="0"/>
-              <a:t>Detection</a:t>
-            </a:r>
-          </a:p>
-        </p:txBody>
-      </p:sp>
-      <p:cxnSp>
-        <p:nvCxnSpPr>
-          <p:cNvPr id="215" name="Straight Arrow Connector 214">
-            <a:extLst>
-              <a:ext uri="{FF2B5EF4-FFF2-40B4-BE49-F238E27FC236}">
-                <a16:creationId xmlns:a16="http://schemas.microsoft.com/office/drawing/2014/main" id="{2F2A33F8-388E-3212-42F2-F316A4DCC9A2}"/>
-              </a:ext>
-            </a:extLst>
-          </p:cNvPr>
-          <p:cNvCxnSpPr>
-            <a:cxnSpLocks/>
-          </p:cNvCxnSpPr>
-          <p:nvPr/>
-        </p:nvCxnSpPr>
-        <p:spPr>
-          <a:xfrm>
-            <a:off x="2909696" y="5929325"/>
-            <a:ext cx="442253" cy="0"/>
-          </a:xfrm>
-          <a:prstGeom prst="straightConnector1">
-            <a:avLst/>
-          </a:prstGeom>
-          <a:ln>
-            <a:solidFill>
-              <a:srgbClr val="FF0000"/>
-            </a:solidFill>
             <a:tailEnd type="triangle"/>
           </a:ln>
         </p:spPr>
@@ -11799,10 +11407,147 @@
       </p:cxnSp>
       <p:cxnSp>
         <p:nvCxnSpPr>
-          <p:cNvPr id="217" name="Straight Arrow Connector 216">
-            <a:extLst>
-              <a:ext uri="{FF2B5EF4-FFF2-40B4-BE49-F238E27FC236}">
-                <a16:creationId xmlns:a16="http://schemas.microsoft.com/office/drawing/2014/main" id="{0C1B9568-C8CF-C3E1-D013-4AB3BA49E0A6}"/>
+          <p:cNvPr id="200" name="Straight Arrow Connector 199">
+            <a:extLst>
+              <a:ext uri="{FF2B5EF4-FFF2-40B4-BE49-F238E27FC236}">
+                <a16:creationId xmlns:a16="http://schemas.microsoft.com/office/drawing/2014/main" id="{D4AC79D0-5B76-D005-1A27-F76F271A152F}"/>
+              </a:ext>
+            </a:extLst>
+          </p:cNvPr>
+          <p:cNvCxnSpPr/>
+          <p:nvPr/>
+        </p:nvCxnSpPr>
+        <p:spPr>
+          <a:xfrm flipV="1">
+            <a:off x="8862876" y="3303944"/>
+            <a:ext cx="0" cy="167673"/>
+          </a:xfrm>
+          <a:prstGeom prst="straightConnector1">
+            <a:avLst/>
+          </a:prstGeom>
+          <a:ln>
+            <a:solidFill>
+              <a:srgbClr val="FF0000"/>
+            </a:solidFill>
+            <a:tailEnd type="triangle"/>
+          </a:ln>
+        </p:spPr>
+        <p:style>
+          <a:lnRef idx="2">
+            <a:schemeClr val="accent1"/>
+          </a:lnRef>
+          <a:fillRef idx="0">
+            <a:schemeClr val="accent1"/>
+          </a:fillRef>
+          <a:effectRef idx="1">
+            <a:schemeClr val="accent1"/>
+          </a:effectRef>
+          <a:fontRef idx="minor">
+            <a:schemeClr val="tx1"/>
+          </a:fontRef>
+        </p:style>
+      </p:cxnSp>
+      <p:sp>
+        <p:nvSpPr>
+          <p:cNvPr id="212" name="Rectangle 211">
+            <a:extLst>
+              <a:ext uri="{FF2B5EF4-FFF2-40B4-BE49-F238E27FC236}">
+                <a16:creationId xmlns:a16="http://schemas.microsoft.com/office/drawing/2014/main" id="{42328FB6-6571-FA3C-8E81-028268A77042}"/>
+              </a:ext>
+            </a:extLst>
+          </p:cNvPr>
+          <p:cNvSpPr/>
+          <p:nvPr/>
+        </p:nvSpPr>
+        <p:spPr>
+          <a:xfrm>
+            <a:off x="3351306" y="5573141"/>
+            <a:ext cx="678789" cy="484706"/>
+          </a:xfrm>
+          <a:prstGeom prst="rect">
+            <a:avLst/>
+          </a:prstGeom>
+          <a:solidFill>
+            <a:schemeClr val="bg1"/>
+          </a:solidFill>
+        </p:spPr>
+        <p:style>
+          <a:lnRef idx="2">
+            <a:schemeClr val="accent1">
+              <a:shade val="15000"/>
+            </a:schemeClr>
+          </a:lnRef>
+          <a:fillRef idx="1">
+            <a:schemeClr val="accent1"/>
+          </a:fillRef>
+          <a:effectRef idx="0">
+            <a:schemeClr val="accent1"/>
+          </a:effectRef>
+          <a:fontRef idx="minor">
+            <a:schemeClr val="lt1"/>
+          </a:fontRef>
+        </p:style>
+        <p:txBody>
+          <a:bodyPr rtlCol="0" anchor="ctr"/>
+          <a:lstStyle/>
+          <a:p>
+            <a:pPr algn="ctr"/>
+            <a:r>
+              <a:rPr lang="en-US" dirty="0"/>
+              <a:t>PC</a:t>
+            </a:r>
+          </a:p>
+        </p:txBody>
+      </p:sp>
+      <p:sp>
+        <p:nvSpPr>
+          <p:cNvPr id="213" name="TextBox 212">
+            <a:extLst>
+              <a:ext uri="{FF2B5EF4-FFF2-40B4-BE49-F238E27FC236}">
+                <a16:creationId xmlns:a16="http://schemas.microsoft.com/office/drawing/2014/main" id="{3468D653-D2DB-10F8-EB42-1EF2F69D462B}"/>
+              </a:ext>
+            </a:extLst>
+          </p:cNvPr>
+          <p:cNvSpPr txBox="1"/>
+          <p:nvPr/>
+        </p:nvSpPr>
+        <p:spPr>
+          <a:xfrm>
+            <a:off x="3316652" y="5593028"/>
+            <a:ext cx="729687" cy="400110"/>
+          </a:xfrm>
+          <a:prstGeom prst="rect">
+            <a:avLst/>
+          </a:prstGeom>
+          <a:noFill/>
+        </p:spPr>
+        <p:txBody>
+          <a:bodyPr wrap="square" rtlCol="0">
+            <a:spAutoFit/>
+          </a:bodyPr>
+          <a:lstStyle/>
+          <a:p>
+            <a:pPr algn="ctr"/>
+            <a:r>
+              <a:rPr lang="en-US" sz="1000" dirty="0"/>
+              <a:t>Hazard</a:t>
+            </a:r>
+          </a:p>
+          <a:p>
+            <a:pPr algn="ctr"/>
+            <a:r>
+              <a:rPr lang="en-US" sz="1000" dirty="0"/>
+              <a:t>Detection</a:t>
+            </a:r>
+          </a:p>
+        </p:txBody>
+      </p:sp>
+      <p:cxnSp>
+        <p:nvCxnSpPr>
+          <p:cNvPr id="215" name="Straight Arrow Connector 214">
+            <a:extLst>
+              <a:ext uri="{FF2B5EF4-FFF2-40B4-BE49-F238E27FC236}">
+                <a16:creationId xmlns:a16="http://schemas.microsoft.com/office/drawing/2014/main" id="{2F2A33F8-388E-3212-42F2-F316A4DCC9A2}"/>
               </a:ext>
             </a:extLst>
           </p:cNvPr>
@@ -11812,9 +11557,9 @@
           <p:nvPr/>
         </p:nvCxnSpPr>
         <p:spPr>
-          <a:xfrm flipH="1">
-            <a:off x="4040822" y="5917227"/>
-            <a:ext cx="205614" cy="0"/>
+          <a:xfrm>
+            <a:off x="2909696" y="5929325"/>
+            <a:ext cx="442253" cy="0"/>
           </a:xfrm>
           <a:prstGeom prst="straightConnector1">
             <a:avLst/>
@@ -12068,59 +11813,16 @@
           </p:cNvPr>
           <p:cNvCxnSpPr>
             <a:cxnSpLocks/>
+            <a:stCxn id="213" idx="3"/>
           </p:cNvCxnSpPr>
           <p:nvPr/>
         </p:nvCxnSpPr>
         <p:spPr>
           <a:xfrm flipV="1">
-            <a:off x="4124761" y="5481780"/>
-            <a:ext cx="0" cy="225402"/>
-          </a:xfrm>
-          <a:prstGeom prst="straightConnector1">
-            <a:avLst/>
-          </a:prstGeom>
-          <a:ln>
-            <a:solidFill>
-              <a:srgbClr val="FF0000"/>
-            </a:solidFill>
-            <a:tailEnd type="triangle"/>
-          </a:ln>
-        </p:spPr>
-        <p:style>
-          <a:lnRef idx="2">
-            <a:schemeClr val="accent1"/>
-          </a:lnRef>
-          <a:fillRef idx="0">
-            <a:schemeClr val="accent1"/>
-          </a:fillRef>
-          <a:effectRef idx="1">
-            <a:schemeClr val="accent1"/>
-          </a:effectRef>
-          <a:fontRef idx="minor">
-            <a:schemeClr val="tx1"/>
-          </a:fontRef>
-        </p:style>
-      </p:cxnSp>
-      <p:cxnSp>
-        <p:nvCxnSpPr>
-          <p:cNvPr id="226" name="Straight Arrow Connector 225">
-            <a:extLst>
-              <a:ext uri="{FF2B5EF4-FFF2-40B4-BE49-F238E27FC236}">
-                <a16:creationId xmlns:a16="http://schemas.microsoft.com/office/drawing/2014/main" id="{13244B44-D83A-17F1-89B4-8EB805ADF839}"/>
-              </a:ext>
-            </a:extLst>
-          </p:cNvPr>
-          <p:cNvCxnSpPr>
-            <a:cxnSpLocks/>
-          </p:cNvCxnSpPr>
-          <p:nvPr/>
-        </p:nvCxnSpPr>
-        <p:spPr>
-          <a:xfrm>
-            <a:off x="4172823" y="5931908"/>
-            <a:ext cx="0" cy="402752"/>
-          </a:xfrm>
-          <a:prstGeom prst="straightConnector1">
+            <a:off x="4046339" y="5488130"/>
+            <a:ext cx="84772" cy="304953"/>
+          </a:xfrm>
+          <a:prstGeom prst="bentConnector2">
             <a:avLst/>
           </a:prstGeom>
           <a:ln>
@@ -12219,62 +11921,10 @@
       </p:sp>
       <p:sp>
         <p:nvSpPr>
-          <p:cNvPr id="233" name="Rectangle 232">
-            <a:extLst>
-              <a:ext uri="{FF2B5EF4-FFF2-40B4-BE49-F238E27FC236}">
-                <a16:creationId xmlns:a16="http://schemas.microsoft.com/office/drawing/2014/main" id="{E46D487D-09B4-2769-C34D-554786351A6B}"/>
-              </a:ext>
-            </a:extLst>
-          </p:cNvPr>
-          <p:cNvSpPr/>
-          <p:nvPr/>
-        </p:nvSpPr>
-        <p:spPr>
-          <a:xfrm>
-            <a:off x="4027858" y="6344690"/>
-            <a:ext cx="663423" cy="460640"/>
-          </a:xfrm>
-          <a:prstGeom prst="rect">
-            <a:avLst/>
-          </a:prstGeom>
-          <a:solidFill>
-            <a:schemeClr val="bg1"/>
-          </a:solidFill>
-        </p:spPr>
-        <p:style>
-          <a:lnRef idx="2">
-            <a:schemeClr val="accent1">
-              <a:shade val="15000"/>
-            </a:schemeClr>
-          </a:lnRef>
-          <a:fillRef idx="1">
-            <a:schemeClr val="accent1"/>
-          </a:fillRef>
-          <a:effectRef idx="0">
-            <a:schemeClr val="accent1"/>
-          </a:effectRef>
-          <a:fontRef idx="minor">
-            <a:schemeClr val="lt1"/>
-          </a:fontRef>
-        </p:style>
-        <p:txBody>
-          <a:bodyPr rtlCol="0" anchor="ctr"/>
-          <a:lstStyle/>
-          <a:p>
-            <a:pPr algn="ctr"/>
-            <a:r>
-              <a:rPr lang="en-US" dirty="0"/>
-              <a:t>PC</a:t>
-            </a:r>
-          </a:p>
-        </p:txBody>
-      </p:sp>
-      <p:sp>
-        <p:nvSpPr>
-          <p:cNvPr id="234" name="TextBox 233">
-            <a:extLst>
-              <a:ext uri="{FF2B5EF4-FFF2-40B4-BE49-F238E27FC236}">
-                <a16:creationId xmlns:a16="http://schemas.microsoft.com/office/drawing/2014/main" id="{B03E2FCB-F4FA-D322-14B8-FB5E1F9573B3}"/>
+          <p:cNvPr id="246" name="TextBox 245">
+            <a:extLst>
+              <a:ext uri="{FF2B5EF4-FFF2-40B4-BE49-F238E27FC236}">
+                <a16:creationId xmlns:a16="http://schemas.microsoft.com/office/drawing/2014/main" id="{3BA26EF9-D46A-45DC-70BA-21364891CB27}"/>
               </a:ext>
             </a:extLst>
           </p:cNvPr>
@@ -12283,8 +11933,8 @@
         </p:nvSpPr>
         <p:spPr>
           <a:xfrm>
-            <a:off x="4505477" y="6442196"/>
-            <a:ext cx="194710" cy="246221"/>
+            <a:off x="3685159" y="5311002"/>
+            <a:ext cx="861489" cy="246221"/>
           </a:xfrm>
           <a:prstGeom prst="rect">
             <a:avLst/>
@@ -12299,19 +11949,19 @@
           <a:p>
             <a:pPr algn="ctr"/>
             <a:r>
-              <a:rPr lang="en-US" sz="1000" dirty="0"/>
-              <a:t>&gt;</a:t>
-            </a:r>
-            <a:endParaRPr lang="en-US" sz="900" dirty="0"/>
+              <a:rPr lang="en-US" sz="1000" dirty="0" err="1"/>
+              <a:t>start_stall</a:t>
+            </a:r>
+            <a:endParaRPr lang="en-US" sz="1000" dirty="0"/>
           </a:p>
         </p:txBody>
       </p:sp>
       <p:cxnSp>
         <p:nvCxnSpPr>
-          <p:cNvPr id="237" name="Straight Arrow Connector 236">
-            <a:extLst>
-              <a:ext uri="{FF2B5EF4-FFF2-40B4-BE49-F238E27FC236}">
-                <a16:creationId xmlns:a16="http://schemas.microsoft.com/office/drawing/2014/main" id="{657E1736-86D8-4C89-8125-43EFDE81B0A7}"/>
+          <p:cNvPr id="12" name="Straight Arrow Connector 11">
+            <a:extLst>
+              <a:ext uri="{FF2B5EF4-FFF2-40B4-BE49-F238E27FC236}">
+                <a16:creationId xmlns:a16="http://schemas.microsoft.com/office/drawing/2014/main" id="{C104EDAA-FD8A-4089-C218-104118D04C57}"/>
               </a:ext>
             </a:extLst>
           </p:cNvPr>
@@ -12322,8 +11972,1013 @@
         </p:nvCxnSpPr>
         <p:spPr>
           <a:xfrm>
-            <a:off x="4696548" y="6575010"/>
-            <a:ext cx="229874" cy="0"/>
+            <a:off x="3472911" y="6051625"/>
+            <a:ext cx="0" cy="402752"/>
+          </a:xfrm>
+          <a:prstGeom prst="straightConnector1">
+            <a:avLst/>
+          </a:prstGeom>
+          <a:ln>
+            <a:solidFill>
+              <a:srgbClr val="FF0000"/>
+            </a:solidFill>
+            <a:tailEnd type="triangle"/>
+          </a:ln>
+        </p:spPr>
+        <p:style>
+          <a:lnRef idx="2">
+            <a:schemeClr val="accent1"/>
+          </a:lnRef>
+          <a:fillRef idx="0">
+            <a:schemeClr val="accent1"/>
+          </a:fillRef>
+          <a:effectRef idx="1">
+            <a:schemeClr val="accent1"/>
+          </a:effectRef>
+          <a:fontRef idx="minor">
+            <a:schemeClr val="tx1"/>
+          </a:fontRef>
+        </p:style>
+      </p:cxnSp>
+      <p:sp>
+        <p:nvSpPr>
+          <p:cNvPr id="17" name="TextBox 16">
+            <a:extLst>
+              <a:ext uri="{FF2B5EF4-FFF2-40B4-BE49-F238E27FC236}">
+                <a16:creationId xmlns:a16="http://schemas.microsoft.com/office/drawing/2014/main" id="{DD23CE11-915B-B2E0-552F-137C75A7E9C7}"/>
+              </a:ext>
+            </a:extLst>
+          </p:cNvPr>
+          <p:cNvSpPr txBox="1"/>
+          <p:nvPr/>
+        </p:nvSpPr>
+        <p:spPr>
+          <a:xfrm>
+            <a:off x="2990194" y="6420855"/>
+            <a:ext cx="935914" cy="246221"/>
+          </a:xfrm>
+          <a:prstGeom prst="rect">
+            <a:avLst/>
+          </a:prstGeom>
+          <a:noFill/>
+        </p:spPr>
+        <p:txBody>
+          <a:bodyPr wrap="square" rtlCol="0">
+            <a:spAutoFit/>
+          </a:bodyPr>
+          <a:lstStyle/>
+          <a:p>
+            <a:pPr algn="ctr"/>
+            <a:r>
+              <a:rPr lang="en-US" sz="1000" dirty="0" err="1"/>
+              <a:t>double_stall</a:t>
+            </a:r>
+            <a:endParaRPr lang="en-US" sz="1000" dirty="0"/>
+          </a:p>
+        </p:txBody>
+      </p:sp>
+      <p:sp>
+        <p:nvSpPr>
+          <p:cNvPr id="26" name="TextBox 25">
+            <a:extLst>
+              <a:ext uri="{FF2B5EF4-FFF2-40B4-BE49-F238E27FC236}">
+                <a16:creationId xmlns:a16="http://schemas.microsoft.com/office/drawing/2014/main" id="{9CC47C76-DD2C-D041-5CBE-9D776C368B34}"/>
+              </a:ext>
+            </a:extLst>
+          </p:cNvPr>
+          <p:cNvSpPr txBox="1"/>
+          <p:nvPr/>
+        </p:nvSpPr>
+        <p:spPr>
+          <a:xfrm>
+            <a:off x="10320409" y="4691861"/>
+            <a:ext cx="1323237" cy="507831"/>
+          </a:xfrm>
+          <a:prstGeom prst="rect">
+            <a:avLst/>
+          </a:prstGeom>
+          <a:noFill/>
+        </p:spPr>
+        <p:txBody>
+          <a:bodyPr wrap="square" rtlCol="0">
+            <a:spAutoFit/>
+          </a:bodyPr>
+          <a:lstStyle/>
+          <a:p>
+            <a:pPr algn="ctr"/>
+            <a:r>
+              <a:rPr lang="en-US" sz="900" dirty="0" err="1"/>
+              <a:t>Mem_wb_mem_read</a:t>
+            </a:r>
+            <a:endParaRPr lang="en-US" sz="900" dirty="0"/>
+          </a:p>
+          <a:p>
+            <a:pPr algn="ctr"/>
+            <a:r>
+              <a:rPr lang="en-US" sz="900" dirty="0" err="1"/>
+              <a:t>Mem_wb_load_addr</a:t>
+            </a:r>
+            <a:endParaRPr lang="en-US" sz="900" dirty="0"/>
+          </a:p>
+          <a:p>
+            <a:pPr algn="ctr"/>
+            <a:r>
+              <a:rPr lang="en-US" sz="900" dirty="0" err="1"/>
+              <a:t>Mem_wb_reg_write</a:t>
+            </a:r>
+            <a:endParaRPr lang="en-US" sz="900" dirty="0"/>
+          </a:p>
+        </p:txBody>
+      </p:sp>
+      <p:sp>
+        <p:nvSpPr>
+          <p:cNvPr id="30" name="TextBox 29">
+            <a:extLst>
+              <a:ext uri="{FF2B5EF4-FFF2-40B4-BE49-F238E27FC236}">
+                <a16:creationId xmlns:a16="http://schemas.microsoft.com/office/drawing/2014/main" id="{E635BE5E-0175-A984-4634-A2F4E5A70C71}"/>
+              </a:ext>
+            </a:extLst>
+          </p:cNvPr>
+          <p:cNvSpPr txBox="1"/>
+          <p:nvPr/>
+        </p:nvSpPr>
+        <p:spPr>
+          <a:xfrm>
+            <a:off x="7078049" y="4968860"/>
+            <a:ext cx="870752" cy="230832"/>
+          </a:xfrm>
+          <a:prstGeom prst="rect">
+            <a:avLst/>
+          </a:prstGeom>
+          <a:noFill/>
+        </p:spPr>
+        <p:txBody>
+          <a:bodyPr wrap="none" rtlCol="0">
+            <a:spAutoFit/>
+          </a:bodyPr>
+          <a:lstStyle/>
+          <a:p>
+            <a:pPr algn="ctr"/>
+            <a:r>
+              <a:rPr lang="en-US" sz="900" dirty="0" err="1"/>
+              <a:t>Mux_select_A</a:t>
+            </a:r>
+            <a:endParaRPr lang="en-US" sz="900" dirty="0"/>
+          </a:p>
+        </p:txBody>
+      </p:sp>
+      <p:sp>
+        <p:nvSpPr>
+          <p:cNvPr id="32" name="TextBox 31">
+            <a:extLst>
+              <a:ext uri="{FF2B5EF4-FFF2-40B4-BE49-F238E27FC236}">
+                <a16:creationId xmlns:a16="http://schemas.microsoft.com/office/drawing/2014/main" id="{9EF20020-EAC6-2114-3BDA-071BAE6FC249}"/>
+              </a:ext>
+            </a:extLst>
+          </p:cNvPr>
+          <p:cNvSpPr txBox="1"/>
+          <p:nvPr/>
+        </p:nvSpPr>
+        <p:spPr>
+          <a:xfrm>
+            <a:off x="11443096" y="3395706"/>
+            <a:ext cx="627096" cy="230832"/>
+          </a:xfrm>
+          <a:prstGeom prst="rect">
+            <a:avLst/>
+          </a:prstGeom>
+          <a:noFill/>
+        </p:spPr>
+        <p:txBody>
+          <a:bodyPr wrap="none" rtlCol="0">
+            <a:spAutoFit/>
+          </a:bodyPr>
+          <a:lstStyle/>
+          <a:p>
+            <a:pPr algn="r"/>
+            <a:r>
+              <a:rPr lang="en-US" sz="900" dirty="0" err="1"/>
+              <a:t>Wb_data</a:t>
+            </a:r>
+            <a:endParaRPr lang="en-US" sz="900" dirty="0"/>
+          </a:p>
+        </p:txBody>
+      </p:sp>
+      <p:sp>
+        <p:nvSpPr>
+          <p:cNvPr id="34" name="TextBox 33">
+            <a:extLst>
+              <a:ext uri="{FF2B5EF4-FFF2-40B4-BE49-F238E27FC236}">
+                <a16:creationId xmlns:a16="http://schemas.microsoft.com/office/drawing/2014/main" id="{B994D76F-D5BC-1FFF-FA32-971690FD9BD6}"/>
+              </a:ext>
+            </a:extLst>
+          </p:cNvPr>
+          <p:cNvSpPr txBox="1"/>
+          <p:nvPr/>
+        </p:nvSpPr>
+        <p:spPr>
+          <a:xfrm>
+            <a:off x="6831451" y="2608314"/>
+            <a:ext cx="1444076" cy="230832"/>
+          </a:xfrm>
+          <a:prstGeom prst="rect">
+            <a:avLst/>
+          </a:prstGeom>
+          <a:noFill/>
+        </p:spPr>
+        <p:txBody>
+          <a:bodyPr wrap="square" rtlCol="0">
+            <a:spAutoFit/>
+          </a:bodyPr>
+          <a:lstStyle/>
+          <a:p>
+            <a:r>
+              <a:rPr lang="en-US" sz="900" dirty="0"/>
+              <a:t>ex_mem_reg2_data</a:t>
+            </a:r>
+          </a:p>
+        </p:txBody>
+      </p:sp>
+      <p:sp>
+        <p:nvSpPr>
+          <p:cNvPr id="35" name="TextBox 34">
+            <a:extLst>
+              <a:ext uri="{FF2B5EF4-FFF2-40B4-BE49-F238E27FC236}">
+                <a16:creationId xmlns:a16="http://schemas.microsoft.com/office/drawing/2014/main" id="{8653D7AD-5790-BC2B-34D0-29D22785E2B7}"/>
+              </a:ext>
+            </a:extLst>
+          </p:cNvPr>
+          <p:cNvSpPr txBox="1"/>
+          <p:nvPr/>
+        </p:nvSpPr>
+        <p:spPr>
+          <a:xfrm>
+            <a:off x="6740629" y="2815152"/>
+            <a:ext cx="2141630" cy="230832"/>
+          </a:xfrm>
+          <a:prstGeom prst="rect">
+            <a:avLst/>
+          </a:prstGeom>
+          <a:noFill/>
+        </p:spPr>
+        <p:txBody>
+          <a:bodyPr wrap="square" rtlCol="0">
+            <a:spAutoFit/>
+          </a:bodyPr>
+          <a:lstStyle/>
+          <a:p>
+            <a:r>
+              <a:rPr lang="en-US" sz="900" dirty="0" err="1"/>
+              <a:t>data_memory_byte_not_word</a:t>
+            </a:r>
+            <a:endParaRPr lang="en-US" sz="900" dirty="0"/>
+          </a:p>
+        </p:txBody>
+      </p:sp>
+      <p:sp>
+        <p:nvSpPr>
+          <p:cNvPr id="47" name="TextBox 46">
+            <a:extLst>
+              <a:ext uri="{FF2B5EF4-FFF2-40B4-BE49-F238E27FC236}">
+                <a16:creationId xmlns:a16="http://schemas.microsoft.com/office/drawing/2014/main" id="{7A2D0FC9-0AEA-6751-473E-46F04E9C4588}"/>
+              </a:ext>
+            </a:extLst>
+          </p:cNvPr>
+          <p:cNvSpPr txBox="1"/>
+          <p:nvPr/>
+        </p:nvSpPr>
+        <p:spPr>
+          <a:xfrm>
+            <a:off x="9247891" y="2637188"/>
+            <a:ext cx="710452" cy="230832"/>
+          </a:xfrm>
+          <a:prstGeom prst="rect">
+            <a:avLst/>
+          </a:prstGeom>
+          <a:noFill/>
+        </p:spPr>
+        <p:txBody>
+          <a:bodyPr wrap="none" rtlCol="0">
+            <a:spAutoFit/>
+          </a:bodyPr>
+          <a:lstStyle/>
+          <a:p>
+            <a:pPr algn="ctr"/>
+            <a:r>
+              <a:rPr lang="en-US" sz="900" dirty="0" err="1"/>
+              <a:t>Mem_data</a:t>
+            </a:r>
+            <a:endParaRPr lang="en-US" sz="900" dirty="0"/>
+          </a:p>
+        </p:txBody>
+      </p:sp>
+      <p:sp>
+        <p:nvSpPr>
+          <p:cNvPr id="52" name="TextBox 51">
+            <a:extLst>
+              <a:ext uri="{FF2B5EF4-FFF2-40B4-BE49-F238E27FC236}">
+                <a16:creationId xmlns:a16="http://schemas.microsoft.com/office/drawing/2014/main" id="{5471BB21-26FA-113F-6410-3E151FDE51F2}"/>
+              </a:ext>
+            </a:extLst>
+          </p:cNvPr>
+          <p:cNvSpPr txBox="1"/>
+          <p:nvPr/>
+        </p:nvSpPr>
+        <p:spPr>
+          <a:xfrm>
+            <a:off x="8145875" y="3471177"/>
+            <a:ext cx="2141630" cy="369332"/>
+          </a:xfrm>
+          <a:prstGeom prst="rect">
+            <a:avLst/>
+          </a:prstGeom>
+          <a:noFill/>
+        </p:spPr>
+        <p:txBody>
+          <a:bodyPr wrap="square" rtlCol="0">
+            <a:spAutoFit/>
+          </a:bodyPr>
+          <a:lstStyle/>
+          <a:p>
+            <a:r>
+              <a:rPr lang="en-US" sz="900" dirty="0" err="1"/>
+              <a:t>Ex_mem_mem_read</a:t>
+            </a:r>
+            <a:endParaRPr lang="en-US" sz="900" dirty="0"/>
+          </a:p>
+          <a:p>
+            <a:r>
+              <a:rPr lang="en-US" sz="900" dirty="0" err="1"/>
+              <a:t>Ex_mem_mem_write</a:t>
+            </a:r>
+            <a:endParaRPr lang="en-US" sz="900" dirty="0"/>
+          </a:p>
+        </p:txBody>
+      </p:sp>
+      <p:sp>
+        <p:nvSpPr>
+          <p:cNvPr id="53" name="TextBox 52">
+            <a:extLst>
+              <a:ext uri="{FF2B5EF4-FFF2-40B4-BE49-F238E27FC236}">
+                <a16:creationId xmlns:a16="http://schemas.microsoft.com/office/drawing/2014/main" id="{F966588D-FAA9-4B24-34E7-A635640A1CE3}"/>
+              </a:ext>
+            </a:extLst>
+          </p:cNvPr>
+          <p:cNvSpPr txBox="1"/>
+          <p:nvPr/>
+        </p:nvSpPr>
+        <p:spPr>
+          <a:xfrm>
+            <a:off x="6763720" y="3571106"/>
+            <a:ext cx="2141630" cy="230832"/>
+          </a:xfrm>
+          <a:prstGeom prst="rect">
+            <a:avLst/>
+          </a:prstGeom>
+          <a:noFill/>
+        </p:spPr>
+        <p:txBody>
+          <a:bodyPr wrap="square" rtlCol="0">
+            <a:spAutoFit/>
+          </a:bodyPr>
+          <a:lstStyle/>
+          <a:p>
+            <a:r>
+              <a:rPr lang="en-US" sz="900" dirty="0" err="1"/>
+              <a:t>Alu_result</a:t>
+            </a:r>
+            <a:endParaRPr lang="en-US" sz="900" dirty="0"/>
+          </a:p>
+        </p:txBody>
+      </p:sp>
+      <p:sp>
+        <p:nvSpPr>
+          <p:cNvPr id="58" name="TextBox 57">
+            <a:extLst>
+              <a:ext uri="{FF2B5EF4-FFF2-40B4-BE49-F238E27FC236}">
+                <a16:creationId xmlns:a16="http://schemas.microsoft.com/office/drawing/2014/main" id="{C1B5F2FF-1806-FEC1-4C63-BDABB28D9525}"/>
+              </a:ext>
+            </a:extLst>
+          </p:cNvPr>
+          <p:cNvSpPr txBox="1"/>
+          <p:nvPr/>
+        </p:nvSpPr>
+        <p:spPr>
+          <a:xfrm>
+            <a:off x="6075198" y="4265390"/>
+            <a:ext cx="2141630" cy="230832"/>
+          </a:xfrm>
+          <a:prstGeom prst="rect">
+            <a:avLst/>
+          </a:prstGeom>
+          <a:noFill/>
+        </p:spPr>
+        <p:txBody>
+          <a:bodyPr wrap="square" rtlCol="0">
+            <a:spAutoFit/>
+          </a:bodyPr>
+          <a:lstStyle/>
+          <a:p>
+            <a:r>
+              <a:rPr lang="en-US" sz="900" dirty="0" err="1"/>
+              <a:t>Id_ex_alu_op</a:t>
+            </a:r>
+            <a:endParaRPr lang="en-US" sz="900" dirty="0"/>
+          </a:p>
+        </p:txBody>
+      </p:sp>
+      <p:sp>
+        <p:nvSpPr>
+          <p:cNvPr id="61" name="TextBox 60">
+            <a:extLst>
+              <a:ext uri="{FF2B5EF4-FFF2-40B4-BE49-F238E27FC236}">
+                <a16:creationId xmlns:a16="http://schemas.microsoft.com/office/drawing/2014/main" id="{6586A8F5-FF9B-AF72-B209-70E05A3C4C90}"/>
+              </a:ext>
+            </a:extLst>
+          </p:cNvPr>
+          <p:cNvSpPr txBox="1"/>
+          <p:nvPr/>
+        </p:nvSpPr>
+        <p:spPr>
+          <a:xfrm>
+            <a:off x="5502617" y="4366686"/>
+            <a:ext cx="6094476" cy="215444"/>
+          </a:xfrm>
+          <a:prstGeom prst="rect">
+            <a:avLst/>
+          </a:prstGeom>
+          <a:noFill/>
+        </p:spPr>
+        <p:txBody>
+          <a:bodyPr wrap="square">
+            <a:spAutoFit/>
+          </a:bodyPr>
+          <a:lstStyle/>
+          <a:p>
+            <a:r>
+              <a:rPr lang="en-US" sz="800" dirty="0" err="1"/>
+              <a:t>id_ex_alu_src</a:t>
+            </a:r>
+            <a:endParaRPr lang="en-US" sz="800" dirty="0"/>
+          </a:p>
+        </p:txBody>
+      </p:sp>
+      <p:sp>
+        <p:nvSpPr>
+          <p:cNvPr id="67" name="TextBox 66">
+            <a:extLst>
+              <a:ext uri="{FF2B5EF4-FFF2-40B4-BE49-F238E27FC236}">
+                <a16:creationId xmlns:a16="http://schemas.microsoft.com/office/drawing/2014/main" id="{0DE4D1D1-3C8B-5D28-1BE1-87D69A498710}"/>
+              </a:ext>
+            </a:extLst>
+          </p:cNvPr>
+          <p:cNvSpPr txBox="1"/>
+          <p:nvPr/>
+        </p:nvSpPr>
+        <p:spPr>
+          <a:xfrm>
+            <a:off x="4253896" y="4423811"/>
+            <a:ext cx="800522" cy="246221"/>
+          </a:xfrm>
+          <a:prstGeom prst="rect">
+            <a:avLst/>
+          </a:prstGeom>
+          <a:noFill/>
+        </p:spPr>
+        <p:txBody>
+          <a:bodyPr wrap="square">
+            <a:spAutoFit/>
+          </a:bodyPr>
+          <a:lstStyle/>
+          <a:p>
+            <a:r>
+              <a:rPr lang="en-US" sz="1000" dirty="0" err="1"/>
+              <a:t>If_id_imm</a:t>
+            </a:r>
+            <a:endParaRPr lang="en-US" sz="1000" dirty="0"/>
+          </a:p>
+        </p:txBody>
+      </p:sp>
+      <p:sp>
+        <p:nvSpPr>
+          <p:cNvPr id="76" name="TextBox 75">
+            <a:extLst>
+              <a:ext uri="{FF2B5EF4-FFF2-40B4-BE49-F238E27FC236}">
+                <a16:creationId xmlns:a16="http://schemas.microsoft.com/office/drawing/2014/main" id="{C72FE120-3DA3-7D28-D2DB-9A88D6E7CB3D}"/>
+              </a:ext>
+            </a:extLst>
+          </p:cNvPr>
+          <p:cNvSpPr txBox="1"/>
+          <p:nvPr/>
+        </p:nvSpPr>
+        <p:spPr>
+          <a:xfrm>
+            <a:off x="4400515" y="3618502"/>
+            <a:ext cx="1114580" cy="246221"/>
+          </a:xfrm>
+          <a:prstGeom prst="rect">
+            <a:avLst/>
+          </a:prstGeom>
+          <a:noFill/>
+        </p:spPr>
+        <p:txBody>
+          <a:bodyPr wrap="square">
+            <a:spAutoFit/>
+          </a:bodyPr>
+          <a:lstStyle/>
+          <a:p>
+            <a:r>
+              <a:rPr lang="en-US" sz="1000" dirty="0"/>
+              <a:t>id_ex_reg2_data</a:t>
+            </a:r>
+          </a:p>
+        </p:txBody>
+      </p:sp>
+      <p:sp>
+        <p:nvSpPr>
+          <p:cNvPr id="77" name="TextBox 76">
+            <a:extLst>
+              <a:ext uri="{FF2B5EF4-FFF2-40B4-BE49-F238E27FC236}">
+                <a16:creationId xmlns:a16="http://schemas.microsoft.com/office/drawing/2014/main" id="{C64FDDB7-A03E-BDD9-58AF-1A4E9FB847A7}"/>
+              </a:ext>
+            </a:extLst>
+          </p:cNvPr>
+          <p:cNvSpPr txBox="1"/>
+          <p:nvPr/>
+        </p:nvSpPr>
+        <p:spPr>
+          <a:xfrm>
+            <a:off x="4370378" y="3323758"/>
+            <a:ext cx="1114580" cy="246221"/>
+          </a:xfrm>
+          <a:prstGeom prst="rect">
+            <a:avLst/>
+          </a:prstGeom>
+          <a:noFill/>
+        </p:spPr>
+        <p:txBody>
+          <a:bodyPr wrap="square">
+            <a:spAutoFit/>
+          </a:bodyPr>
+          <a:lstStyle/>
+          <a:p>
+            <a:r>
+              <a:rPr lang="en-US" sz="1000" dirty="0"/>
+              <a:t>id_ex_reg1_data</a:t>
+            </a:r>
+          </a:p>
+        </p:txBody>
+      </p:sp>
+      <p:sp>
+        <p:nvSpPr>
+          <p:cNvPr id="78" name="TextBox 77">
+            <a:extLst>
+              <a:ext uri="{FF2B5EF4-FFF2-40B4-BE49-F238E27FC236}">
+                <a16:creationId xmlns:a16="http://schemas.microsoft.com/office/drawing/2014/main" id="{6A787009-37CF-89DA-2721-9D540D30C74E}"/>
+              </a:ext>
+            </a:extLst>
+          </p:cNvPr>
+          <p:cNvSpPr txBox="1"/>
+          <p:nvPr/>
+        </p:nvSpPr>
+        <p:spPr>
+          <a:xfrm>
+            <a:off x="5642891" y="1940243"/>
+            <a:ext cx="865785" cy="230832"/>
+          </a:xfrm>
+          <a:prstGeom prst="rect">
+            <a:avLst/>
+          </a:prstGeom>
+          <a:noFill/>
+        </p:spPr>
+        <p:txBody>
+          <a:bodyPr wrap="square" rtlCol="0">
+            <a:spAutoFit/>
+          </a:bodyPr>
+          <a:lstStyle/>
+          <a:p>
+            <a:r>
+              <a:rPr lang="en-US" sz="900" dirty="0" err="1"/>
+              <a:t>Mux_select_A</a:t>
+            </a:r>
+            <a:endParaRPr lang="en-US" sz="900" dirty="0"/>
+          </a:p>
+        </p:txBody>
+      </p:sp>
+      <p:sp>
+        <p:nvSpPr>
+          <p:cNvPr id="79" name="TextBox 78">
+            <a:extLst>
+              <a:ext uri="{FF2B5EF4-FFF2-40B4-BE49-F238E27FC236}">
+                <a16:creationId xmlns:a16="http://schemas.microsoft.com/office/drawing/2014/main" id="{248E2C8D-6548-FCCB-5FDF-829820ADD9D7}"/>
+              </a:ext>
+            </a:extLst>
+          </p:cNvPr>
+          <p:cNvSpPr txBox="1"/>
+          <p:nvPr/>
+        </p:nvSpPr>
+        <p:spPr>
+          <a:xfrm>
+            <a:off x="4545005" y="2946253"/>
+            <a:ext cx="787835" cy="461665"/>
+          </a:xfrm>
+          <a:prstGeom prst="rect">
+            <a:avLst/>
+          </a:prstGeom>
+          <a:noFill/>
+        </p:spPr>
+        <p:txBody>
+          <a:bodyPr wrap="square">
+            <a:spAutoFit/>
+          </a:bodyPr>
+          <a:lstStyle/>
+          <a:p>
+            <a:r>
+              <a:rPr lang="en-US" sz="800" dirty="0" err="1"/>
+              <a:t>If_id_branch</a:t>
+            </a:r>
+            <a:endParaRPr lang="en-US" sz="800" dirty="0"/>
+          </a:p>
+          <a:p>
+            <a:r>
+              <a:rPr lang="en-US" sz="800" dirty="0" err="1"/>
+              <a:t>If_id_jump</a:t>
+            </a:r>
+            <a:endParaRPr lang="en-US" sz="800" dirty="0"/>
+          </a:p>
+          <a:p>
+            <a:r>
+              <a:rPr lang="en-US" sz="800" dirty="0" err="1"/>
+              <a:t>Double_stall</a:t>
+            </a:r>
+            <a:endParaRPr lang="en-US" sz="800" dirty="0"/>
+          </a:p>
+        </p:txBody>
+      </p:sp>
+      <p:grpSp>
+        <p:nvGrpSpPr>
+          <p:cNvPr id="80" name="Group 79">
+            <a:extLst>
+              <a:ext uri="{FF2B5EF4-FFF2-40B4-BE49-F238E27FC236}">
+                <a16:creationId xmlns:a16="http://schemas.microsoft.com/office/drawing/2014/main" id="{94C29561-91B7-E936-DC83-6F5D5106CCE4}"/>
+              </a:ext>
+            </a:extLst>
+          </p:cNvPr>
+          <p:cNvGrpSpPr/>
+          <p:nvPr/>
+        </p:nvGrpSpPr>
+        <p:grpSpPr>
+          <a:xfrm rot="5400000">
+            <a:off x="4549467" y="898307"/>
+            <a:ext cx="234557" cy="529824"/>
+            <a:chOff x="6175096" y="3854324"/>
+            <a:chExt cx="144932" cy="375881"/>
+          </a:xfrm>
+        </p:grpSpPr>
+        <p:cxnSp>
+          <p:nvCxnSpPr>
+            <p:cNvPr id="84" name="Straight Connector 83">
+              <a:extLst>
+                <a:ext uri="{FF2B5EF4-FFF2-40B4-BE49-F238E27FC236}">
+                  <a16:creationId xmlns:a16="http://schemas.microsoft.com/office/drawing/2014/main" id="{619EF7C2-7624-1A2D-B2CD-70DAF03F2177}"/>
+                </a:ext>
+              </a:extLst>
+            </p:cNvPr>
+            <p:cNvCxnSpPr>
+              <a:cxnSpLocks/>
+            </p:cNvCxnSpPr>
+            <p:nvPr/>
+          </p:nvCxnSpPr>
+          <p:spPr>
+            <a:xfrm>
+              <a:off x="6180266" y="3861114"/>
+              <a:ext cx="0" cy="369091"/>
+            </a:xfrm>
+            <a:prstGeom prst="line">
+              <a:avLst/>
+            </a:prstGeom>
+          </p:spPr>
+          <p:style>
+            <a:lnRef idx="2">
+              <a:schemeClr val="accent1"/>
+            </a:lnRef>
+            <a:fillRef idx="0">
+              <a:schemeClr val="accent1"/>
+            </a:fillRef>
+            <a:effectRef idx="1">
+              <a:schemeClr val="accent1"/>
+            </a:effectRef>
+            <a:fontRef idx="minor">
+              <a:schemeClr val="tx1"/>
+            </a:fontRef>
+          </p:style>
+        </p:cxnSp>
+        <p:cxnSp>
+          <p:nvCxnSpPr>
+            <p:cNvPr id="86" name="Straight Connector 85">
+              <a:extLst>
+                <a:ext uri="{FF2B5EF4-FFF2-40B4-BE49-F238E27FC236}">
+                  <a16:creationId xmlns:a16="http://schemas.microsoft.com/office/drawing/2014/main" id="{5F81C4DE-B1C4-D148-E3FB-AE42412E8144}"/>
+                </a:ext>
+              </a:extLst>
+            </p:cNvPr>
+            <p:cNvCxnSpPr>
+              <a:cxnSpLocks/>
+            </p:cNvCxnSpPr>
+            <p:nvPr/>
+          </p:nvCxnSpPr>
+          <p:spPr>
+            <a:xfrm>
+              <a:off x="6320028" y="3936909"/>
+              <a:ext cx="0" cy="212558"/>
+            </a:xfrm>
+            <a:prstGeom prst="line">
+              <a:avLst/>
+            </a:prstGeom>
+          </p:spPr>
+          <p:style>
+            <a:lnRef idx="2">
+              <a:schemeClr val="accent1"/>
+            </a:lnRef>
+            <a:fillRef idx="0">
+              <a:schemeClr val="accent1"/>
+            </a:fillRef>
+            <a:effectRef idx="1">
+              <a:schemeClr val="accent1"/>
+            </a:effectRef>
+            <a:fontRef idx="minor">
+              <a:schemeClr val="tx1"/>
+            </a:fontRef>
+          </p:style>
+        </p:cxnSp>
+        <p:cxnSp>
+          <p:nvCxnSpPr>
+            <p:cNvPr id="88" name="Straight Connector 87">
+              <a:extLst>
+                <a:ext uri="{FF2B5EF4-FFF2-40B4-BE49-F238E27FC236}">
+                  <a16:creationId xmlns:a16="http://schemas.microsoft.com/office/drawing/2014/main" id="{5027FD3F-DFEB-E3A1-01CD-3F28F49CE615}"/>
+                </a:ext>
+              </a:extLst>
+            </p:cNvPr>
+            <p:cNvCxnSpPr>
+              <a:cxnSpLocks/>
+            </p:cNvCxnSpPr>
+            <p:nvPr/>
+          </p:nvCxnSpPr>
+          <p:spPr>
+            <a:xfrm flipH="1">
+              <a:off x="6175096" y="4152620"/>
+              <a:ext cx="144932" cy="77585"/>
+            </a:xfrm>
+            <a:prstGeom prst="line">
+              <a:avLst/>
+            </a:prstGeom>
+          </p:spPr>
+          <p:style>
+            <a:lnRef idx="2">
+              <a:schemeClr val="accent1"/>
+            </a:lnRef>
+            <a:fillRef idx="0">
+              <a:schemeClr val="accent1"/>
+            </a:fillRef>
+            <a:effectRef idx="1">
+              <a:schemeClr val="accent1"/>
+            </a:effectRef>
+            <a:fontRef idx="minor">
+              <a:schemeClr val="tx1"/>
+            </a:fontRef>
+          </p:style>
+        </p:cxnSp>
+        <p:cxnSp>
+          <p:nvCxnSpPr>
+            <p:cNvPr id="106" name="Straight Connector 105">
+              <a:extLst>
+                <a:ext uri="{FF2B5EF4-FFF2-40B4-BE49-F238E27FC236}">
+                  <a16:creationId xmlns:a16="http://schemas.microsoft.com/office/drawing/2014/main" id="{19289637-D2A1-EDC5-C2D0-AF83760B8424}"/>
+                </a:ext>
+              </a:extLst>
+            </p:cNvPr>
+            <p:cNvCxnSpPr>
+              <a:cxnSpLocks/>
+            </p:cNvCxnSpPr>
+            <p:nvPr/>
+          </p:nvCxnSpPr>
+          <p:spPr>
+            <a:xfrm flipH="1" flipV="1">
+              <a:off x="6175096" y="3854324"/>
+              <a:ext cx="144932" cy="85738"/>
+            </a:xfrm>
+            <a:prstGeom prst="line">
+              <a:avLst/>
+            </a:prstGeom>
+          </p:spPr>
+          <p:style>
+            <a:lnRef idx="2">
+              <a:schemeClr val="accent1"/>
+            </a:lnRef>
+            <a:fillRef idx="0">
+              <a:schemeClr val="accent1"/>
+            </a:fillRef>
+            <a:effectRef idx="1">
+              <a:schemeClr val="accent1"/>
+            </a:effectRef>
+            <a:fontRef idx="minor">
+              <a:schemeClr val="tx1"/>
+            </a:fontRef>
+          </p:style>
+        </p:cxnSp>
+      </p:grpSp>
+      <p:grpSp>
+        <p:nvGrpSpPr>
+          <p:cNvPr id="107" name="Group 106">
+            <a:extLst>
+              <a:ext uri="{FF2B5EF4-FFF2-40B4-BE49-F238E27FC236}">
+                <a16:creationId xmlns:a16="http://schemas.microsoft.com/office/drawing/2014/main" id="{F3DD440B-EA7A-7F99-8872-ECF2FFD397E5}"/>
+              </a:ext>
+            </a:extLst>
+          </p:cNvPr>
+          <p:cNvGrpSpPr/>
+          <p:nvPr/>
+        </p:nvGrpSpPr>
+        <p:grpSpPr>
+          <a:xfrm rot="5400000">
+            <a:off x="5054401" y="886198"/>
+            <a:ext cx="234557" cy="529824"/>
+            <a:chOff x="6175096" y="3854324"/>
+            <a:chExt cx="144932" cy="375881"/>
+          </a:xfrm>
+        </p:grpSpPr>
+        <p:cxnSp>
+          <p:nvCxnSpPr>
+            <p:cNvPr id="108" name="Straight Connector 107">
+              <a:extLst>
+                <a:ext uri="{FF2B5EF4-FFF2-40B4-BE49-F238E27FC236}">
+                  <a16:creationId xmlns:a16="http://schemas.microsoft.com/office/drawing/2014/main" id="{ED236413-5BDA-7F2D-2F19-186970304EBD}"/>
+                </a:ext>
+              </a:extLst>
+            </p:cNvPr>
+            <p:cNvCxnSpPr>
+              <a:cxnSpLocks/>
+            </p:cNvCxnSpPr>
+            <p:nvPr/>
+          </p:nvCxnSpPr>
+          <p:spPr>
+            <a:xfrm>
+              <a:off x="6180266" y="3861114"/>
+              <a:ext cx="0" cy="369091"/>
+            </a:xfrm>
+            <a:prstGeom prst="line">
+              <a:avLst/>
+            </a:prstGeom>
+          </p:spPr>
+          <p:style>
+            <a:lnRef idx="2">
+              <a:schemeClr val="accent1"/>
+            </a:lnRef>
+            <a:fillRef idx="0">
+              <a:schemeClr val="accent1"/>
+            </a:fillRef>
+            <a:effectRef idx="1">
+              <a:schemeClr val="accent1"/>
+            </a:effectRef>
+            <a:fontRef idx="minor">
+              <a:schemeClr val="tx1"/>
+            </a:fontRef>
+          </p:style>
+        </p:cxnSp>
+        <p:cxnSp>
+          <p:nvCxnSpPr>
+            <p:cNvPr id="109" name="Straight Connector 108">
+              <a:extLst>
+                <a:ext uri="{FF2B5EF4-FFF2-40B4-BE49-F238E27FC236}">
+                  <a16:creationId xmlns:a16="http://schemas.microsoft.com/office/drawing/2014/main" id="{0608C9F8-7B83-1596-06A6-D2FE93496289}"/>
+                </a:ext>
+              </a:extLst>
+            </p:cNvPr>
+            <p:cNvCxnSpPr>
+              <a:cxnSpLocks/>
+            </p:cNvCxnSpPr>
+            <p:nvPr/>
+          </p:nvCxnSpPr>
+          <p:spPr>
+            <a:xfrm>
+              <a:off x="6320028" y="3936909"/>
+              <a:ext cx="0" cy="212558"/>
+            </a:xfrm>
+            <a:prstGeom prst="line">
+              <a:avLst/>
+            </a:prstGeom>
+          </p:spPr>
+          <p:style>
+            <a:lnRef idx="2">
+              <a:schemeClr val="accent1"/>
+            </a:lnRef>
+            <a:fillRef idx="0">
+              <a:schemeClr val="accent1"/>
+            </a:fillRef>
+            <a:effectRef idx="1">
+              <a:schemeClr val="accent1"/>
+            </a:effectRef>
+            <a:fontRef idx="minor">
+              <a:schemeClr val="tx1"/>
+            </a:fontRef>
+          </p:style>
+        </p:cxnSp>
+        <p:cxnSp>
+          <p:nvCxnSpPr>
+            <p:cNvPr id="110" name="Straight Connector 109">
+              <a:extLst>
+                <a:ext uri="{FF2B5EF4-FFF2-40B4-BE49-F238E27FC236}">
+                  <a16:creationId xmlns:a16="http://schemas.microsoft.com/office/drawing/2014/main" id="{AB5281A7-72A6-9060-2D8B-DB475A7F4920}"/>
+                </a:ext>
+              </a:extLst>
+            </p:cNvPr>
+            <p:cNvCxnSpPr>
+              <a:cxnSpLocks/>
+            </p:cNvCxnSpPr>
+            <p:nvPr/>
+          </p:nvCxnSpPr>
+          <p:spPr>
+            <a:xfrm flipH="1">
+              <a:off x="6175096" y="4152620"/>
+              <a:ext cx="144932" cy="77585"/>
+            </a:xfrm>
+            <a:prstGeom prst="line">
+              <a:avLst/>
+            </a:prstGeom>
+          </p:spPr>
+          <p:style>
+            <a:lnRef idx="2">
+              <a:schemeClr val="accent1"/>
+            </a:lnRef>
+            <a:fillRef idx="0">
+              <a:schemeClr val="accent1"/>
+            </a:fillRef>
+            <a:effectRef idx="1">
+              <a:schemeClr val="accent1"/>
+            </a:effectRef>
+            <a:fontRef idx="minor">
+              <a:schemeClr val="tx1"/>
+            </a:fontRef>
+          </p:style>
+        </p:cxnSp>
+        <p:cxnSp>
+          <p:nvCxnSpPr>
+            <p:cNvPr id="145" name="Straight Connector 144">
+              <a:extLst>
+                <a:ext uri="{FF2B5EF4-FFF2-40B4-BE49-F238E27FC236}">
+                  <a16:creationId xmlns:a16="http://schemas.microsoft.com/office/drawing/2014/main" id="{602D3BE1-4D9A-CAC7-AE46-8B6262021FAA}"/>
+                </a:ext>
+              </a:extLst>
+            </p:cNvPr>
+            <p:cNvCxnSpPr>
+              <a:cxnSpLocks/>
+            </p:cNvCxnSpPr>
+            <p:nvPr/>
+          </p:nvCxnSpPr>
+          <p:spPr>
+            <a:xfrm flipH="1" flipV="1">
+              <a:off x="6175096" y="3854324"/>
+              <a:ext cx="144932" cy="85738"/>
+            </a:xfrm>
+            <a:prstGeom prst="line">
+              <a:avLst/>
+            </a:prstGeom>
+          </p:spPr>
+          <p:style>
+            <a:lnRef idx="2">
+              <a:schemeClr val="accent1"/>
+            </a:lnRef>
+            <a:fillRef idx="0">
+              <a:schemeClr val="accent1"/>
+            </a:fillRef>
+            <a:effectRef idx="1">
+              <a:schemeClr val="accent1"/>
+            </a:effectRef>
+            <a:fontRef idx="minor">
+              <a:schemeClr val="tx1"/>
+            </a:fontRef>
+          </p:style>
+        </p:cxnSp>
+      </p:grpSp>
+      <p:cxnSp>
+        <p:nvCxnSpPr>
+          <p:cNvPr id="160" name="Straight Arrow Connector 159">
+            <a:extLst>
+              <a:ext uri="{FF2B5EF4-FFF2-40B4-BE49-F238E27FC236}">
+                <a16:creationId xmlns:a16="http://schemas.microsoft.com/office/drawing/2014/main" id="{531856D5-49FC-4A5C-F91A-EF5346CB859F}"/>
+              </a:ext>
+            </a:extLst>
+          </p:cNvPr>
+          <p:cNvCxnSpPr>
+            <a:cxnSpLocks/>
+          </p:cNvCxnSpPr>
+          <p:nvPr/>
+        </p:nvCxnSpPr>
+        <p:spPr>
+          <a:xfrm flipH="1">
+            <a:off x="5371814" y="1196058"/>
+            <a:ext cx="753976" cy="0"/>
           </a:xfrm>
           <a:prstGeom prst="straightConnector1">
             <a:avLst/>
@@ -12352,10 +13007,10 @@
       </p:cxnSp>
       <p:cxnSp>
         <p:nvCxnSpPr>
-          <p:cNvPr id="241" name="Straight Arrow Connector 240">
-            <a:extLst>
-              <a:ext uri="{FF2B5EF4-FFF2-40B4-BE49-F238E27FC236}">
-                <a16:creationId xmlns:a16="http://schemas.microsoft.com/office/drawing/2014/main" id="{CFF1441C-A871-C028-33DF-68E89133CAC3}"/>
+          <p:cNvPr id="175" name="Straight Arrow Connector 174">
+            <a:extLst>
+              <a:ext uri="{FF2B5EF4-FFF2-40B4-BE49-F238E27FC236}">
+                <a16:creationId xmlns:a16="http://schemas.microsoft.com/office/drawing/2014/main" id="{7B00CDFC-18F6-0AC8-F4EB-39ED9CD8E0B2}"/>
               </a:ext>
             </a:extLst>
           </p:cNvPr>
@@ -12366,8 +13021,8 @@
         </p:nvCxnSpPr>
         <p:spPr>
           <a:xfrm>
-            <a:off x="4566636" y="6234492"/>
-            <a:ext cx="0" cy="100168"/>
+            <a:off x="3898868" y="1198481"/>
+            <a:ext cx="584963" cy="0"/>
           </a:xfrm>
           <a:prstGeom prst="straightConnector1">
             <a:avLst/>
@@ -12396,10 +13051,10 @@
       </p:cxnSp>
       <p:sp>
         <p:nvSpPr>
-          <p:cNvPr id="242" name="TextBox 241">
-            <a:extLst>
-              <a:ext uri="{FF2B5EF4-FFF2-40B4-BE49-F238E27FC236}">
-                <a16:creationId xmlns:a16="http://schemas.microsoft.com/office/drawing/2014/main" id="{5CF4424D-C27A-0FCF-199D-B10372DC54C3}"/>
+          <p:cNvPr id="178" name="TextBox 177">
+            <a:extLst>
+              <a:ext uri="{FF2B5EF4-FFF2-40B4-BE49-F238E27FC236}">
+                <a16:creationId xmlns:a16="http://schemas.microsoft.com/office/drawing/2014/main" id="{2F2105B3-B9BA-AF76-55DA-E9B5FB8E7837}"/>
               </a:ext>
             </a:extLst>
           </p:cNvPr>
@@ -12408,8 +13063,8 @@
         </p:nvSpPr>
         <p:spPr>
           <a:xfrm>
-            <a:off x="4443371" y="6038820"/>
-            <a:ext cx="245580" cy="230832"/>
+            <a:off x="4993221" y="1234154"/>
+            <a:ext cx="1205872" cy="215444"/>
           </a:xfrm>
           <a:prstGeom prst="rect">
             <a:avLst/>
@@ -12417,25 +13072,25 @@
           <a:noFill/>
         </p:spPr>
         <p:txBody>
-          <a:bodyPr wrap="none" rtlCol="0">
+          <a:bodyPr wrap="square">
             <a:spAutoFit/>
           </a:bodyPr>
           <a:lstStyle/>
           <a:p>
-            <a:pPr algn="ctr"/>
-            <a:r>
-              <a:rPr lang="en-US" sz="900" dirty="0"/>
-              <a:t>0</a:t>
-            </a:r>
-          </a:p>
-        </p:txBody>
-      </p:sp>
-      <p:sp>
-        <p:nvSpPr>
-          <p:cNvPr id="244" name="TextBox 243">
-            <a:extLst>
-              <a:ext uri="{FF2B5EF4-FFF2-40B4-BE49-F238E27FC236}">
-                <a16:creationId xmlns:a16="http://schemas.microsoft.com/office/drawing/2014/main" id="{7F7540FB-45AD-3BC3-48E6-D125DD8550E7}"/>
+            <a:r>
+              <a:rPr lang="en-US" sz="800" dirty="0" err="1"/>
+              <a:t>Branch_forward_a</a:t>
+            </a:r>
+            <a:endParaRPr lang="en-US" sz="800" dirty="0"/>
+          </a:p>
+        </p:txBody>
+      </p:sp>
+      <p:sp>
+        <p:nvSpPr>
+          <p:cNvPr id="179" name="TextBox 178">
+            <a:extLst>
+              <a:ext uri="{FF2B5EF4-FFF2-40B4-BE49-F238E27FC236}">
+                <a16:creationId xmlns:a16="http://schemas.microsoft.com/office/drawing/2014/main" id="{7A9E41AD-72EE-FE6B-1A63-8E814737017B}"/>
               </a:ext>
             </a:extLst>
           </p:cNvPr>
@@ -12444,8 +13099,8 @@
         </p:nvSpPr>
         <p:spPr>
           <a:xfrm>
-            <a:off x="4802612" y="6461559"/>
-            <a:ext cx="574196" cy="246221"/>
+            <a:off x="3727057" y="1242054"/>
+            <a:ext cx="1205872" cy="215444"/>
           </a:xfrm>
           <a:prstGeom prst="rect">
             <a:avLst/>
@@ -12453,25 +13108,25 @@
           <a:noFill/>
         </p:spPr>
         <p:txBody>
-          <a:bodyPr wrap="square" rtlCol="0">
+          <a:bodyPr wrap="square">
             <a:spAutoFit/>
           </a:bodyPr>
           <a:lstStyle/>
           <a:p>
-            <a:pPr algn="ctr"/>
-            <a:r>
-              <a:rPr lang="en-US" sz="1000" dirty="0"/>
-              <a:t>Stall</a:t>
-            </a:r>
-          </a:p>
-        </p:txBody>
-      </p:sp>
-      <p:sp>
-        <p:nvSpPr>
-          <p:cNvPr id="245" name="TextBox 244">
-            <a:extLst>
-              <a:ext uri="{FF2B5EF4-FFF2-40B4-BE49-F238E27FC236}">
-                <a16:creationId xmlns:a16="http://schemas.microsoft.com/office/drawing/2014/main" id="{6F693865-D421-FB3F-F617-69C8DFB74DDA}"/>
+            <a:r>
+              <a:rPr lang="en-US" sz="800" dirty="0" err="1"/>
+              <a:t>Branch_forward_b</a:t>
+            </a:r>
+            <a:endParaRPr lang="en-US" sz="800" dirty="0"/>
+          </a:p>
+        </p:txBody>
+      </p:sp>
+      <p:sp>
+        <p:nvSpPr>
+          <p:cNvPr id="180" name="TextBox 179">
+            <a:extLst>
+              <a:ext uri="{FF2B5EF4-FFF2-40B4-BE49-F238E27FC236}">
+                <a16:creationId xmlns:a16="http://schemas.microsoft.com/office/drawing/2014/main" id="{DFF58657-7D38-1E67-CB5E-B133E949A28C}"/>
               </a:ext>
             </a:extLst>
           </p:cNvPr>
@@ -12480,8 +13135,8 @@
         </p:nvSpPr>
         <p:spPr>
           <a:xfrm>
-            <a:off x="3408450" y="6047112"/>
-            <a:ext cx="861489" cy="246221"/>
+            <a:off x="6075784" y="1018674"/>
+            <a:ext cx="1486162" cy="707886"/>
           </a:xfrm>
           <a:prstGeom prst="rect">
             <a:avLst/>
@@ -12489,26 +13144,52 @@
           <a:noFill/>
         </p:spPr>
         <p:txBody>
-          <a:bodyPr wrap="square" rtlCol="0">
+          <a:bodyPr wrap="square">
             <a:spAutoFit/>
           </a:bodyPr>
           <a:lstStyle/>
           <a:p>
-            <a:pPr algn="ctr"/>
-            <a:r>
-              <a:rPr lang="en-US" sz="1000" dirty="0" err="1"/>
-              <a:t>stall_count</a:t>
-            </a:r>
-            <a:endParaRPr lang="en-US" sz="1000" dirty="0"/>
-          </a:p>
-        </p:txBody>
-      </p:sp>
-      <p:sp>
-        <p:nvSpPr>
-          <p:cNvPr id="246" name="TextBox 245">
-            <a:extLst>
-              <a:ext uri="{FF2B5EF4-FFF2-40B4-BE49-F238E27FC236}">
-                <a16:creationId xmlns:a16="http://schemas.microsoft.com/office/drawing/2014/main" id="{3BA26EF9-D46A-45DC-70BA-21364891CB27}"/>
+            <a:r>
+              <a:rPr lang="en-US" sz="800" dirty="0" err="1"/>
+              <a:t>Ex_mem_reg_write</a:t>
+            </a:r>
+            <a:endParaRPr lang="en-US" sz="800" dirty="0"/>
+          </a:p>
+          <a:p>
+            <a:r>
+              <a:rPr lang="en-US" sz="800" dirty="0" err="1"/>
+              <a:t>Ex_mem_rd</a:t>
+            </a:r>
+            <a:endParaRPr lang="en-US" sz="800" dirty="0"/>
+          </a:p>
+          <a:p>
+            <a:r>
+              <a:rPr lang="en-US" sz="800" dirty="0"/>
+              <a:t>If_id_rs1</a:t>
+            </a:r>
+          </a:p>
+          <a:p>
+            <a:r>
+              <a:rPr lang="en-US" sz="800" dirty="0" err="1"/>
+              <a:t>Mem_wb_reg_write</a:t>
+            </a:r>
+            <a:endParaRPr lang="en-US" sz="800" dirty="0"/>
+          </a:p>
+          <a:p>
+            <a:r>
+              <a:rPr lang="en-US" sz="800" dirty="0" err="1"/>
+              <a:t>Mem_wb_rd</a:t>
+            </a:r>
+            <a:endParaRPr lang="en-US" sz="800" dirty="0"/>
+          </a:p>
+        </p:txBody>
+      </p:sp>
+      <p:sp>
+        <p:nvSpPr>
+          <p:cNvPr id="181" name="TextBox 180">
+            <a:extLst>
+              <a:ext uri="{FF2B5EF4-FFF2-40B4-BE49-F238E27FC236}">
+                <a16:creationId xmlns:a16="http://schemas.microsoft.com/office/drawing/2014/main" id="{FBF93EAE-EE89-CE1E-8351-AFECD113530A}"/>
               </a:ext>
             </a:extLst>
           </p:cNvPr>
@@ -12517,8 +13198,8 @@
         </p:nvSpPr>
         <p:spPr>
           <a:xfrm>
-            <a:off x="3685159" y="5311002"/>
-            <a:ext cx="861489" cy="246221"/>
+            <a:off x="2886371" y="1006930"/>
+            <a:ext cx="1486162" cy="707886"/>
           </a:xfrm>
           <a:prstGeom prst="rect">
             <a:avLst/>
@@ -12526,26 +13207,52 @@
           <a:noFill/>
         </p:spPr>
         <p:txBody>
-          <a:bodyPr wrap="square" rtlCol="0">
+          <a:bodyPr wrap="square">
             <a:spAutoFit/>
           </a:bodyPr>
           <a:lstStyle/>
           <a:p>
-            <a:pPr algn="ctr"/>
-            <a:r>
-              <a:rPr lang="en-US" sz="1000" dirty="0" err="1"/>
-              <a:t>start_stall</a:t>
-            </a:r>
-            <a:endParaRPr lang="en-US" sz="1000" dirty="0"/>
+            <a:r>
+              <a:rPr lang="en-US" sz="800" dirty="0" err="1"/>
+              <a:t>Ex_mem_reg_write</a:t>
+            </a:r>
+            <a:endParaRPr lang="en-US" sz="800" dirty="0"/>
+          </a:p>
+          <a:p>
+            <a:r>
+              <a:rPr lang="en-US" sz="800" dirty="0" err="1"/>
+              <a:t>Ex_mem_rd</a:t>
+            </a:r>
+            <a:endParaRPr lang="en-US" sz="800" dirty="0"/>
+          </a:p>
+          <a:p>
+            <a:r>
+              <a:rPr lang="en-US" sz="800" dirty="0"/>
+              <a:t>If_id_rs2</a:t>
+            </a:r>
+          </a:p>
+          <a:p>
+            <a:r>
+              <a:rPr lang="en-US" sz="800" dirty="0" err="1"/>
+              <a:t>Mem_wb_reg_write</a:t>
+            </a:r>
+            <a:endParaRPr lang="en-US" sz="800" dirty="0"/>
+          </a:p>
+          <a:p>
+            <a:r>
+              <a:rPr lang="en-US" sz="800" dirty="0" err="1"/>
+              <a:t>Mem_wb_rd</a:t>
+            </a:r>
+            <a:endParaRPr lang="en-US" sz="800" dirty="0"/>
           </a:p>
         </p:txBody>
       </p:sp>
       <p:cxnSp>
         <p:nvCxnSpPr>
-          <p:cNvPr id="12" name="Straight Arrow Connector 11">
-            <a:extLst>
-              <a:ext uri="{FF2B5EF4-FFF2-40B4-BE49-F238E27FC236}">
-                <a16:creationId xmlns:a16="http://schemas.microsoft.com/office/drawing/2014/main" id="{C104EDAA-FD8A-4089-C218-104118D04C57}"/>
+          <p:cNvPr id="183" name="Straight Arrow Connector 182">
+            <a:extLst>
+              <a:ext uri="{FF2B5EF4-FFF2-40B4-BE49-F238E27FC236}">
+                <a16:creationId xmlns:a16="http://schemas.microsoft.com/office/drawing/2014/main" id="{26DA370C-39DC-5984-E73A-71C6B2D0B903}"/>
               </a:ext>
             </a:extLst>
           </p:cNvPr>
@@ -12556,16 +13263,13 @@
         </p:nvCxnSpPr>
         <p:spPr>
           <a:xfrm>
-            <a:off x="3472911" y="6051625"/>
-            <a:ext cx="0" cy="402752"/>
+            <a:off x="5236579" y="868968"/>
+            <a:ext cx="0" cy="174020"/>
           </a:xfrm>
           <a:prstGeom prst="straightConnector1">
             <a:avLst/>
           </a:prstGeom>
           <a:ln>
-            <a:solidFill>
-              <a:srgbClr val="FF0000"/>
-            </a:solidFill>
             <a:tailEnd type="triangle"/>
           </a:ln>
         </p:spPr>
@@ -12584,12 +13288,53 @@
           </a:fontRef>
         </p:style>
       </p:cxnSp>
-      <p:sp>
-        <p:nvSpPr>
-          <p:cNvPr id="17" name="TextBox 16">
-            <a:extLst>
-              <a:ext uri="{FF2B5EF4-FFF2-40B4-BE49-F238E27FC236}">
-                <a16:creationId xmlns:a16="http://schemas.microsoft.com/office/drawing/2014/main" id="{DD23CE11-915B-B2E0-552F-137C75A7E9C7}"/>
+      <p:cxnSp>
+        <p:nvCxnSpPr>
+          <p:cNvPr id="201" name="Straight Arrow Connector 200">
+            <a:extLst>
+              <a:ext uri="{FF2B5EF4-FFF2-40B4-BE49-F238E27FC236}">
+                <a16:creationId xmlns:a16="http://schemas.microsoft.com/office/drawing/2014/main" id="{60B1B705-8A7F-3EC6-ED17-C464B3F216D9}"/>
+              </a:ext>
+            </a:extLst>
+          </p:cNvPr>
+          <p:cNvCxnSpPr>
+            <a:cxnSpLocks/>
+          </p:cNvCxnSpPr>
+          <p:nvPr/>
+        </p:nvCxnSpPr>
+        <p:spPr>
+          <a:xfrm>
+            <a:off x="4815413" y="636038"/>
+            <a:ext cx="7354" cy="406950"/>
+          </a:xfrm>
+          <a:prstGeom prst="straightConnector1">
+            <a:avLst/>
+          </a:prstGeom>
+          <a:ln>
+            <a:tailEnd type="triangle"/>
+          </a:ln>
+        </p:spPr>
+        <p:style>
+          <a:lnRef idx="2">
+            <a:schemeClr val="accent1"/>
+          </a:lnRef>
+          <a:fillRef idx="0">
+            <a:schemeClr val="accent1"/>
+          </a:fillRef>
+          <a:effectRef idx="1">
+            <a:schemeClr val="accent1"/>
+          </a:effectRef>
+          <a:fontRef idx="minor">
+            <a:schemeClr val="tx1"/>
+          </a:fontRef>
+        </p:style>
+      </p:cxnSp>
+      <p:sp>
+        <p:nvSpPr>
+          <p:cNvPr id="202" name="TextBox 201">
+            <a:extLst>
+              <a:ext uri="{FF2B5EF4-FFF2-40B4-BE49-F238E27FC236}">
+                <a16:creationId xmlns:a16="http://schemas.microsoft.com/office/drawing/2014/main" id="{48FDB736-CAEC-1BF0-E1AA-D54B99C05764}"/>
               </a:ext>
             </a:extLst>
           </p:cNvPr>
@@ -12598,8 +13343,8 @@
         </p:nvSpPr>
         <p:spPr>
           <a:xfrm>
-            <a:off x="2990194" y="6420855"/>
-            <a:ext cx="935914" cy="246221"/>
+            <a:off x="4896182" y="492455"/>
+            <a:ext cx="1486162" cy="461665"/>
           </a:xfrm>
           <a:prstGeom prst="rect">
             <a:avLst/>
@@ -12607,17 +13352,502 @@
           <a:noFill/>
         </p:spPr>
         <p:txBody>
-          <a:bodyPr wrap="square" rtlCol="0">
+          <a:bodyPr wrap="square">
             <a:spAutoFit/>
           </a:bodyPr>
           <a:lstStyle/>
           <a:p>
+            <a:r>
+              <a:rPr lang="en-US" sz="800" dirty="0" err="1"/>
+              <a:t>Ex_mem_alu_result</a:t>
+            </a:r>
+            <a:endParaRPr lang="en-US" sz="800" dirty="0"/>
+          </a:p>
+          <a:p>
+            <a:r>
+              <a:rPr lang="en-US" sz="800" dirty="0" err="1"/>
+              <a:t>Wb_data</a:t>
+            </a:r>
+            <a:br>
+              <a:rPr lang="en-US" sz="800" dirty="0"/>
+            </a:br>
+            <a:r>
+              <a:rPr lang="en-US" sz="800" dirty="0"/>
+              <a:t>if_id_reg1_data</a:t>
+            </a:r>
+          </a:p>
+        </p:txBody>
+      </p:sp>
+      <p:sp>
+        <p:nvSpPr>
+          <p:cNvPr id="204" name="TextBox 203">
+            <a:extLst>
+              <a:ext uri="{FF2B5EF4-FFF2-40B4-BE49-F238E27FC236}">
+                <a16:creationId xmlns:a16="http://schemas.microsoft.com/office/drawing/2014/main" id="{F4820A01-CC82-8709-E3D2-13A09BA3E208}"/>
+              </a:ext>
+            </a:extLst>
+          </p:cNvPr>
+          <p:cNvSpPr txBox="1"/>
+          <p:nvPr/>
+        </p:nvSpPr>
+        <p:spPr>
+          <a:xfrm>
+            <a:off x="4120537" y="277524"/>
+            <a:ext cx="1486162" cy="461665"/>
+          </a:xfrm>
+          <a:prstGeom prst="rect">
+            <a:avLst/>
+          </a:prstGeom>
+          <a:noFill/>
+        </p:spPr>
+        <p:txBody>
+          <a:bodyPr wrap="square">
+            <a:spAutoFit/>
+          </a:bodyPr>
+          <a:lstStyle/>
+          <a:p>
+            <a:r>
+              <a:rPr lang="en-US" sz="800" dirty="0" err="1"/>
+              <a:t>Ex_mem_alu_result</a:t>
+            </a:r>
+            <a:endParaRPr lang="en-US" sz="800" dirty="0"/>
+          </a:p>
+          <a:p>
+            <a:r>
+              <a:rPr lang="en-US" sz="800" dirty="0" err="1"/>
+              <a:t>Wb_data</a:t>
+            </a:r>
+            <a:br>
+              <a:rPr lang="en-US" sz="800" dirty="0"/>
+            </a:br>
+            <a:r>
+              <a:rPr lang="en-US" sz="800" dirty="0"/>
+              <a:t>if_id_reg2_data</a:t>
+            </a:r>
+          </a:p>
+        </p:txBody>
+      </p:sp>
+      <p:sp>
+        <p:nvSpPr>
+          <p:cNvPr id="205" name="TextBox 204">
+            <a:extLst>
+              <a:ext uri="{FF2B5EF4-FFF2-40B4-BE49-F238E27FC236}">
+                <a16:creationId xmlns:a16="http://schemas.microsoft.com/office/drawing/2014/main" id="{E1959FD3-138A-9323-0752-98DE8388358E}"/>
+              </a:ext>
+            </a:extLst>
+          </p:cNvPr>
+          <p:cNvSpPr txBox="1"/>
+          <p:nvPr/>
+        </p:nvSpPr>
+        <p:spPr>
+          <a:xfrm>
+            <a:off x="2126548" y="4110267"/>
+            <a:ext cx="1292219" cy="246221"/>
+          </a:xfrm>
+          <a:prstGeom prst="rect">
+            <a:avLst/>
+          </a:prstGeom>
+          <a:noFill/>
+        </p:spPr>
+        <p:txBody>
+          <a:bodyPr wrap="square">
+            <a:spAutoFit/>
+          </a:bodyPr>
+          <a:lstStyle/>
+          <a:p>
+            <a:r>
+              <a:rPr lang="en-US" sz="1000" dirty="0" err="1"/>
+              <a:t>Mem_wb_reg_write</a:t>
+            </a:r>
+            <a:endParaRPr lang="en-US" sz="1000" dirty="0"/>
+          </a:p>
+        </p:txBody>
+      </p:sp>
+      <p:sp>
+        <p:nvSpPr>
+          <p:cNvPr id="206" name="TextBox 205">
+            <a:extLst>
+              <a:ext uri="{FF2B5EF4-FFF2-40B4-BE49-F238E27FC236}">
+                <a16:creationId xmlns:a16="http://schemas.microsoft.com/office/drawing/2014/main" id="{0C0BC38F-C796-4406-9876-334E27F5F382}"/>
+              </a:ext>
+            </a:extLst>
+          </p:cNvPr>
+          <p:cNvSpPr txBox="1"/>
+          <p:nvPr/>
+        </p:nvSpPr>
+        <p:spPr>
+          <a:xfrm>
+            <a:off x="2628499" y="3889108"/>
+            <a:ext cx="1292219" cy="246221"/>
+          </a:xfrm>
+          <a:prstGeom prst="rect">
+            <a:avLst/>
+          </a:prstGeom>
+          <a:noFill/>
+        </p:spPr>
+        <p:txBody>
+          <a:bodyPr wrap="square">
+            <a:spAutoFit/>
+          </a:bodyPr>
+          <a:lstStyle/>
+          <a:p>
+            <a:r>
+              <a:rPr lang="en-US" sz="1000" dirty="0" err="1"/>
+              <a:t>Wb_data</a:t>
+            </a:r>
+            <a:endParaRPr lang="en-US" sz="1000" dirty="0"/>
+          </a:p>
+        </p:txBody>
+      </p:sp>
+      <p:sp>
+        <p:nvSpPr>
+          <p:cNvPr id="207" name="TextBox 206">
+            <a:extLst>
+              <a:ext uri="{FF2B5EF4-FFF2-40B4-BE49-F238E27FC236}">
+                <a16:creationId xmlns:a16="http://schemas.microsoft.com/office/drawing/2014/main" id="{A9E0E578-3BF9-4ECC-6A6B-3F55FC8F07F0}"/>
+              </a:ext>
+            </a:extLst>
+          </p:cNvPr>
+          <p:cNvSpPr txBox="1"/>
+          <p:nvPr/>
+        </p:nvSpPr>
+        <p:spPr>
+          <a:xfrm>
+            <a:off x="2729892" y="3621355"/>
+            <a:ext cx="1292219" cy="246221"/>
+          </a:xfrm>
+          <a:prstGeom prst="rect">
+            <a:avLst/>
+          </a:prstGeom>
+          <a:noFill/>
+        </p:spPr>
+        <p:txBody>
+          <a:bodyPr wrap="square">
+            <a:spAutoFit/>
+          </a:bodyPr>
+          <a:lstStyle/>
+          <a:p>
+            <a:r>
+              <a:rPr lang="en-US" sz="1000" dirty="0" err="1"/>
+              <a:t>Mem_wb_rd</a:t>
+            </a:r>
+            <a:endParaRPr lang="en-US" sz="1000" dirty="0"/>
+          </a:p>
+        </p:txBody>
+      </p:sp>
+      <p:sp>
+        <p:nvSpPr>
+          <p:cNvPr id="208" name="TextBox 207">
+            <a:extLst>
+              <a:ext uri="{FF2B5EF4-FFF2-40B4-BE49-F238E27FC236}">
+                <a16:creationId xmlns:a16="http://schemas.microsoft.com/office/drawing/2014/main" id="{4A1D64A2-3686-4EB0-EC5B-5F370F1B9282}"/>
+              </a:ext>
+            </a:extLst>
+          </p:cNvPr>
+          <p:cNvSpPr txBox="1"/>
+          <p:nvPr/>
+        </p:nvSpPr>
+        <p:spPr>
+          <a:xfrm>
+            <a:off x="2710932" y="3430533"/>
+            <a:ext cx="1292219" cy="246221"/>
+          </a:xfrm>
+          <a:prstGeom prst="rect">
+            <a:avLst/>
+          </a:prstGeom>
+          <a:noFill/>
+        </p:spPr>
+        <p:txBody>
+          <a:bodyPr wrap="square">
+            <a:spAutoFit/>
+          </a:bodyPr>
+          <a:lstStyle/>
+          <a:p>
+            <a:r>
+              <a:rPr lang="en-US" sz="1000" dirty="0"/>
+              <a:t>If_id_rs2</a:t>
+            </a:r>
+          </a:p>
+        </p:txBody>
+      </p:sp>
+      <p:sp>
+        <p:nvSpPr>
+          <p:cNvPr id="252" name="TextBox 251">
+            <a:extLst>
+              <a:ext uri="{FF2B5EF4-FFF2-40B4-BE49-F238E27FC236}">
+                <a16:creationId xmlns:a16="http://schemas.microsoft.com/office/drawing/2014/main" id="{15D0BF72-3C23-B339-DAE7-91E77ED54D54}"/>
+              </a:ext>
+            </a:extLst>
+          </p:cNvPr>
+          <p:cNvSpPr txBox="1"/>
+          <p:nvPr/>
+        </p:nvSpPr>
+        <p:spPr>
+          <a:xfrm>
+            <a:off x="2792953" y="3202593"/>
+            <a:ext cx="1292219" cy="246221"/>
+          </a:xfrm>
+          <a:prstGeom prst="rect">
+            <a:avLst/>
+          </a:prstGeom>
+          <a:noFill/>
+        </p:spPr>
+        <p:txBody>
+          <a:bodyPr wrap="square">
+            <a:spAutoFit/>
+          </a:bodyPr>
+          <a:lstStyle/>
+          <a:p>
+            <a:r>
+              <a:rPr lang="en-US" sz="1000" dirty="0"/>
+              <a:t>If_id_rs1</a:t>
+            </a:r>
+          </a:p>
+        </p:txBody>
+      </p:sp>
+      <p:sp>
+        <p:nvSpPr>
+          <p:cNvPr id="253" name="TextBox 252">
+            <a:extLst>
+              <a:ext uri="{FF2B5EF4-FFF2-40B4-BE49-F238E27FC236}">
+                <a16:creationId xmlns:a16="http://schemas.microsoft.com/office/drawing/2014/main" id="{AA3AB88E-EAC2-0E6C-0FF9-BBC61E4E5FFD}"/>
+              </a:ext>
+            </a:extLst>
+          </p:cNvPr>
+          <p:cNvSpPr txBox="1"/>
+          <p:nvPr/>
+        </p:nvSpPr>
+        <p:spPr>
+          <a:xfrm>
+            <a:off x="6295224" y="4533081"/>
+            <a:ext cx="1143262" cy="230832"/>
+          </a:xfrm>
+          <a:prstGeom prst="rect">
+            <a:avLst/>
+          </a:prstGeom>
+          <a:noFill/>
+        </p:spPr>
+        <p:txBody>
+          <a:bodyPr wrap="none" rtlCol="0">
+            <a:spAutoFit/>
+          </a:bodyPr>
+          <a:lstStyle/>
+          <a:p>
             <a:pPr algn="ctr"/>
             <a:r>
+              <a:rPr lang="en-US" sz="900" dirty="0" err="1"/>
+              <a:t>Mem_wb_reg_write</a:t>
+            </a:r>
+            <a:endParaRPr lang="en-US" sz="900" dirty="0"/>
+          </a:p>
+        </p:txBody>
+      </p:sp>
+      <p:sp>
+        <p:nvSpPr>
+          <p:cNvPr id="254" name="TextBox 253">
+            <a:extLst>
+              <a:ext uri="{FF2B5EF4-FFF2-40B4-BE49-F238E27FC236}">
+                <a16:creationId xmlns:a16="http://schemas.microsoft.com/office/drawing/2014/main" id="{54F09A12-1F3A-A54F-AC19-25142AC91C16}"/>
+              </a:ext>
+            </a:extLst>
+          </p:cNvPr>
+          <p:cNvSpPr txBox="1"/>
+          <p:nvPr/>
+        </p:nvSpPr>
+        <p:spPr>
+          <a:xfrm>
+            <a:off x="5665066" y="4853444"/>
+            <a:ext cx="652744" cy="230832"/>
+          </a:xfrm>
+          <a:prstGeom prst="rect">
+            <a:avLst/>
+          </a:prstGeom>
+          <a:noFill/>
+        </p:spPr>
+        <p:txBody>
+          <a:bodyPr wrap="none" rtlCol="0">
+            <a:spAutoFit/>
+          </a:bodyPr>
+          <a:lstStyle/>
+          <a:p>
+            <a:pPr algn="ctr"/>
+            <a:r>
+              <a:rPr lang="en-US" sz="900" dirty="0"/>
+              <a:t>Id_ex_rs1</a:t>
+            </a:r>
+          </a:p>
+        </p:txBody>
+      </p:sp>
+      <p:sp>
+        <p:nvSpPr>
+          <p:cNvPr id="261" name="TextBox 260">
+            <a:extLst>
+              <a:ext uri="{FF2B5EF4-FFF2-40B4-BE49-F238E27FC236}">
+                <a16:creationId xmlns:a16="http://schemas.microsoft.com/office/drawing/2014/main" id="{B21D4D8B-B6D4-7A36-F8D8-1CC25D52EACA}"/>
+              </a:ext>
+            </a:extLst>
+          </p:cNvPr>
+          <p:cNvSpPr txBox="1"/>
+          <p:nvPr/>
+        </p:nvSpPr>
+        <p:spPr>
+          <a:xfrm>
+            <a:off x="2403007" y="6080251"/>
+            <a:ext cx="800522" cy="246221"/>
+          </a:xfrm>
+          <a:prstGeom prst="rect">
+            <a:avLst/>
+          </a:prstGeom>
+          <a:noFill/>
+        </p:spPr>
+        <p:txBody>
+          <a:bodyPr wrap="square">
+            <a:spAutoFit/>
+          </a:bodyPr>
+          <a:lstStyle/>
+          <a:p>
+            <a:r>
               <a:rPr lang="en-US" sz="1000" dirty="0" err="1"/>
-              <a:t>double_stall</a:t>
+              <a:t>Alu_op</a:t>
             </a:r>
             <a:endParaRPr lang="en-US" sz="1000" dirty="0"/>
+          </a:p>
+        </p:txBody>
+      </p:sp>
+      <p:sp>
+        <p:nvSpPr>
+          <p:cNvPr id="262" name="TextBox 261">
+            <a:extLst>
+              <a:ext uri="{FF2B5EF4-FFF2-40B4-BE49-F238E27FC236}">
+                <a16:creationId xmlns:a16="http://schemas.microsoft.com/office/drawing/2014/main" id="{5C152C5C-0EB9-7A78-37DD-495711269C14}"/>
+              </a:ext>
+            </a:extLst>
+          </p:cNvPr>
+          <p:cNvSpPr txBox="1"/>
+          <p:nvPr/>
+        </p:nvSpPr>
+        <p:spPr>
+          <a:xfrm>
+            <a:off x="2094446" y="4719724"/>
+            <a:ext cx="800522" cy="1169551"/>
+          </a:xfrm>
+          <a:prstGeom prst="rect">
+            <a:avLst/>
+          </a:prstGeom>
+          <a:noFill/>
+        </p:spPr>
+        <p:txBody>
+          <a:bodyPr wrap="square">
+            <a:spAutoFit/>
+          </a:bodyPr>
+          <a:lstStyle/>
+          <a:p>
+            <a:r>
+              <a:rPr lang="en-US" sz="1000" dirty="0" err="1"/>
+              <a:t>Reg_write</a:t>
+            </a:r>
+            <a:endParaRPr lang="en-US" sz="1000" dirty="0"/>
+          </a:p>
+          <a:p>
+            <a:r>
+              <a:rPr lang="en-US" sz="1000" dirty="0" err="1"/>
+              <a:t>Mem_read</a:t>
+            </a:r>
+            <a:endParaRPr lang="en-US" sz="1000" dirty="0"/>
+          </a:p>
+          <a:p>
+            <a:r>
+              <a:rPr lang="en-US" sz="1000" dirty="0" err="1"/>
+              <a:t>Mem_write</a:t>
+            </a:r>
+            <a:endParaRPr lang="en-US" sz="1000" dirty="0"/>
+          </a:p>
+          <a:p>
+            <a:r>
+              <a:rPr lang="en-US" sz="1000" dirty="0" err="1"/>
+              <a:t>Alu_src</a:t>
+            </a:r>
+            <a:endParaRPr lang="en-US" sz="1000" dirty="0"/>
+          </a:p>
+          <a:p>
+            <a:r>
+              <a:rPr lang="en-US" sz="1000" dirty="0"/>
+              <a:t>Branch</a:t>
+            </a:r>
+          </a:p>
+          <a:p>
+            <a:r>
+              <a:rPr lang="en-US" sz="1000" dirty="0" err="1"/>
+              <a:t>Load_addr</a:t>
+            </a:r>
+            <a:endParaRPr lang="en-US" sz="1000" dirty="0"/>
+          </a:p>
+          <a:p>
+            <a:r>
+              <a:rPr lang="en-US" sz="1000" dirty="0"/>
+              <a:t>jump</a:t>
+            </a:r>
+          </a:p>
+        </p:txBody>
+      </p:sp>
+      <p:sp>
+        <p:nvSpPr>
+          <p:cNvPr id="263" name="Rectangle 262">
+            <a:extLst>
+              <a:ext uri="{FF2B5EF4-FFF2-40B4-BE49-F238E27FC236}">
+                <a16:creationId xmlns:a16="http://schemas.microsoft.com/office/drawing/2014/main" id="{9260962A-2016-0979-6FFD-A3AA71FA483A}"/>
+              </a:ext>
+            </a:extLst>
+          </p:cNvPr>
+          <p:cNvSpPr/>
+          <p:nvPr/>
+        </p:nvSpPr>
+        <p:spPr>
+          <a:xfrm>
+            <a:off x="4532902" y="5596134"/>
+            <a:ext cx="6230348" cy="850103"/>
+          </a:xfrm>
+          <a:prstGeom prst="rect">
+            <a:avLst/>
+          </a:prstGeom>
+          <a:solidFill>
+            <a:schemeClr val="bg1"/>
+          </a:solidFill>
+        </p:spPr>
+        <p:style>
+          <a:lnRef idx="2">
+            <a:schemeClr val="accent1">
+              <a:shade val="15000"/>
+            </a:schemeClr>
+          </a:lnRef>
+          <a:fillRef idx="1">
+            <a:schemeClr val="accent1"/>
+          </a:fillRef>
+          <a:effectRef idx="0">
+            <a:schemeClr val="accent1"/>
+          </a:effectRef>
+          <a:fontRef idx="minor">
+            <a:schemeClr val="lt1"/>
+          </a:fontRef>
+        </p:style>
+        <p:txBody>
+          <a:bodyPr rtlCol="0" anchor="ctr"/>
+          <a:lstStyle/>
+          <a:p>
+            <a:pPr algn="ctr"/>
+            <a:r>
+              <a:rPr lang="en-US" sz="900" dirty="0">
+                <a:solidFill>
+                  <a:schemeClr val="tx1"/>
+                </a:solidFill>
+              </a:rPr>
+              <a:t>Pipeline Registers</a:t>
+            </a:r>
+            <a:endParaRPr lang="en-US" dirty="0">
+              <a:solidFill>
+                <a:schemeClr val="tx1"/>
+              </a:solidFill>
+            </a:endParaRPr>
           </a:p>
         </p:txBody>
       </p:sp>
